--- a/storeinsight/public/COMPSETTEMPLATE.pptx
+++ b/storeinsight/public/COMPSETTEMPLATE.pptx
@@ -313,7 +313,7 @@
             <a:fld id="{1D8BD707-D9CF-40AE-B4C6-C98DA3205C09}" type="datetimeFigureOut">
               <a:rPr lang="en-US" smtClean="0"/>
               <a:pPr/>
-              <a:t>2/16/2026</a:t>
+              <a:t>2/17/2026</a:t>
             </a:fld>
             <a:endParaRPr lang="en-US"/>
           </a:p>
@@ -478,7 +478,7 @@
             <a:fld id="{1D8BD707-D9CF-40AE-B4C6-C98DA3205C09}" type="datetimeFigureOut">
               <a:rPr lang="en-US" smtClean="0"/>
               <a:pPr/>
-              <a:t>2/16/2026</a:t>
+              <a:t>2/17/2026</a:t>
             </a:fld>
             <a:endParaRPr lang="en-US"/>
           </a:p>
@@ -653,7 +653,7 @@
             <a:fld id="{1D8BD707-D9CF-40AE-B4C6-C98DA3205C09}" type="datetimeFigureOut">
               <a:rPr lang="en-US" smtClean="0"/>
               <a:pPr/>
-              <a:t>2/16/2026</a:t>
+              <a:t>2/17/2026</a:t>
             </a:fld>
             <a:endParaRPr lang="en-US"/>
           </a:p>
@@ -818,7 +818,7 @@
             <a:fld id="{1D8BD707-D9CF-40AE-B4C6-C98DA3205C09}" type="datetimeFigureOut">
               <a:rPr lang="en-US" smtClean="0"/>
               <a:pPr/>
-              <a:t>2/16/2026</a:t>
+              <a:t>2/17/2026</a:t>
             </a:fld>
             <a:endParaRPr lang="en-US"/>
           </a:p>
@@ -1060,7 +1060,7 @@
             <a:fld id="{1D8BD707-D9CF-40AE-B4C6-C98DA3205C09}" type="datetimeFigureOut">
               <a:rPr lang="en-US" smtClean="0"/>
               <a:pPr/>
-              <a:t>2/16/2026</a:t>
+              <a:t>2/17/2026</a:t>
             </a:fld>
             <a:endParaRPr lang="en-US"/>
           </a:p>
@@ -1342,7 +1342,7 @@
             <a:fld id="{1D8BD707-D9CF-40AE-B4C6-C98DA3205C09}" type="datetimeFigureOut">
               <a:rPr lang="en-US" smtClean="0"/>
               <a:pPr/>
-              <a:t>2/16/2026</a:t>
+              <a:t>2/17/2026</a:t>
             </a:fld>
             <a:endParaRPr lang="en-US"/>
           </a:p>
@@ -1758,7 +1758,7 @@
             <a:fld id="{1D8BD707-D9CF-40AE-B4C6-C98DA3205C09}" type="datetimeFigureOut">
               <a:rPr lang="en-US" smtClean="0"/>
               <a:pPr/>
-              <a:t>2/16/2026</a:t>
+              <a:t>2/17/2026</a:t>
             </a:fld>
             <a:endParaRPr lang="en-US"/>
           </a:p>
@@ -1872,7 +1872,7 @@
             <a:fld id="{1D8BD707-D9CF-40AE-B4C6-C98DA3205C09}" type="datetimeFigureOut">
               <a:rPr lang="en-US" smtClean="0"/>
               <a:pPr/>
-              <a:t>2/16/2026</a:t>
+              <a:t>2/17/2026</a:t>
             </a:fld>
             <a:endParaRPr lang="en-US"/>
           </a:p>
@@ -1964,7 +1964,7 @@
             <a:fld id="{1D8BD707-D9CF-40AE-B4C6-C98DA3205C09}" type="datetimeFigureOut">
               <a:rPr lang="en-US" smtClean="0"/>
               <a:pPr/>
-              <a:t>2/16/2026</a:t>
+              <a:t>2/17/2026</a:t>
             </a:fld>
             <a:endParaRPr lang="en-US"/>
           </a:p>
@@ -2236,7 +2236,7 @@
             <a:fld id="{1D8BD707-D9CF-40AE-B4C6-C98DA3205C09}" type="datetimeFigureOut">
               <a:rPr lang="en-US" smtClean="0"/>
               <a:pPr/>
-              <a:t>2/16/2026</a:t>
+              <a:t>2/17/2026</a:t>
             </a:fld>
             <a:endParaRPr lang="en-US"/>
           </a:p>
@@ -2485,7 +2485,7 @@
             <a:fld id="{1D8BD707-D9CF-40AE-B4C6-C98DA3205C09}" type="datetimeFigureOut">
               <a:rPr lang="en-US" smtClean="0"/>
               <a:pPr/>
-              <a:t>2/16/2026</a:t>
+              <a:t>2/17/2026</a:t>
             </a:fld>
             <a:endParaRPr lang="en-US"/>
           </a:p>
@@ -2693,7 +2693,7 @@
             <a:fld id="{1D8BD707-D9CF-40AE-B4C6-C98DA3205C09}" type="datetimeFigureOut">
               <a:rPr lang="en-US" smtClean="0"/>
               <a:pPr/>
-              <a:t>2/16/2026</a:t>
+              <a:t>2/17/2026</a:t>
             </a:fld>
             <a:endParaRPr lang="en-US"/>
           </a:p>
@@ -3278,7 +3278,7 @@
           <p:nvPr>
             <p:extLst>
               <p:ext uri="{D42A27DB-BD31-4B8C-83A1-F6EECF244321}">
-                <p14:modId xmlns:p14="http://schemas.microsoft.com/office/powerpoint/2010/main" val="3796547047"/>
+                <p14:modId xmlns:p14="http://schemas.microsoft.com/office/powerpoint/2010/main" val="1085037999"/>
               </p:ext>
             </p:extLst>
           </p:nvPr>
@@ -3463,7 +3463,7 @@
                         <a:defRPr/>
                       </a:pPr>
                       <a:r>
-                        <a:rPr lang="en-US" sz="1400">
+                        <a:rPr lang="en-US" sz="1400" dirty="0">
                           <a:solidFill>
                             <a:srgbClr val="000000"/>
                           </a:solidFill>
@@ -3474,10 +3474,10 @@
                         </a:rPr>
                         <a:t>{{PP1ADDRESS}}</a:t>
                       </a:r>
-                      <a:endParaRPr lang="en-US" sz="2000"/>
+                      <a:endParaRPr lang="en-US" sz="2000" dirty="0"/>
                     </a:p>
                   </a:txBody>
-                  <a:tcPr marL="0" marR="0" marT="0" marB="0" anchor="ctr">
+                  <a:tcPr marL="0" marR="0" marT="0" marB="0" anchor="b">
                     <a:lnL w="0" cap="flat" cmpd="sng" algn="ctr">
                       <a:solidFill>
                         <a:srgbClr val="99ACFF"/>
@@ -3606,7 +3606,7 @@
                         <a:defRPr/>
                       </a:pPr>
                       <a:r>
-                        <a:rPr lang="en-US" sz="1200">
+                        <a:rPr lang="en-US" sz="1200" dirty="0">
                           <a:solidFill>
                             <a:srgbClr val="4A4A4A"/>
                           </a:solidFill>
@@ -3615,9 +3615,9 @@
                           <a:cs typeface="Avenir"/>
                           <a:sym typeface="Avenir"/>
                         </a:rPr>
-                        <a:t>X Miles Away</a:t>
-                      </a:r>
-                      <a:endParaRPr lang="en-US" sz="2000"/>
+                        <a:t>{{PP1DIST}} Miles Away</a:t>
+                      </a:r>
+                      <a:endParaRPr lang="en-US" sz="2000" dirty="0"/>
                     </a:p>
                   </a:txBody>
                   <a:tcPr marL="0" marR="0" marT="0" marB="0" anchor="ctr">
@@ -3749,7 +3749,7 @@
                         <a:defRPr/>
                       </a:pPr>
                       <a:r>
-                        <a:rPr lang="en-US" sz="1200">
+                        <a:rPr lang="en-US" sz="1200" dirty="0">
                           <a:solidFill>
                             <a:srgbClr val="4A4A4A"/>
                           </a:solidFill>
@@ -3760,7 +3760,7 @@
                         </a:rPr>
                         <a:t>{{PP1FIRSTFLOORORAC}}</a:t>
                       </a:r>
-                      <a:endParaRPr lang="en-US" sz="2000"/>
+                      <a:endParaRPr lang="en-US" sz="2000" dirty="0"/>
                     </a:p>
                   </a:txBody>
                   <a:tcPr marL="0" marR="0" marT="0" marB="0" anchor="ctr">
@@ -3892,7 +3892,7 @@
                         <a:defRPr/>
                       </a:pPr>
                       <a:r>
-                        <a:rPr lang="en-US" sz="2100" b="1">
+                        <a:rPr lang="en-US" sz="2100" b="1" dirty="0">
                           <a:solidFill>
                             <a:srgbClr val="FFFFFF"/>
                           </a:solidFill>
@@ -3903,10 +3903,10 @@
                         </a:rPr>
                         <a:t>Unit Size</a:t>
                       </a:r>
-                      <a:endParaRPr lang="en-US" sz="2000"/>
+                      <a:endParaRPr lang="en-US" sz="2000" dirty="0"/>
                     </a:p>
                   </a:txBody>
-                  <a:tcPr marL="0" marR="0" marT="0" marB="0" anchor="ctr">
+                  <a:tcPr marL="0" marR="0" marT="0" marB="0" anchor="b">
                     <a:lnL w="0" cap="flat" cmpd="sng" algn="ctr">
                       <a:solidFill>
                         <a:srgbClr val="99ACFF"/>
@@ -3974,7 +3974,7 @@
                       <a:endParaRPr lang="en-US" sz="2000"/>
                     </a:p>
                   </a:txBody>
-                  <a:tcPr marL="0" marR="0" marT="0" marB="0" anchor="ctr">
+                  <a:tcPr marL="0" marR="0" marT="0" marB="0" anchor="b">
                     <a:lnL w="0" cap="flat" cmpd="sng" algn="ctr">
                       <a:solidFill>
                         <a:srgbClr val="99ACFF"/>
@@ -4049,7 +4049,7 @@
                       <a:endParaRPr lang="en-US" sz="2000"/>
                     </a:p>
                   </a:txBody>
-                  <a:tcPr marL="0" marR="0" marT="0" marB="0" anchor="ctr">
+                  <a:tcPr marL="0" marR="0" marT="0" marB="0" anchor="b">
                     <a:lnL w="0" cap="flat" cmpd="sng" algn="ctr">
                       <a:solidFill>
                         <a:srgbClr val="99ACFF"/>
@@ -4114,7 +4114,7 @@
                       <a:endParaRPr lang="en-US" sz="2000"/>
                     </a:p>
                   </a:txBody>
-                  <a:tcPr marL="0" marR="0" marT="0" marB="0" anchor="ctr">
+                  <a:tcPr marL="0" marR="0" marT="0" marB="0" anchor="b">
                     <a:lnL w="0" cap="flat" cmpd="sng" algn="ctr">
                       <a:solidFill>
                         <a:srgbClr val="99ACFF"/>
@@ -4186,7 +4186,7 @@
                       <a:endParaRPr lang="en-US" sz="2000"/>
                     </a:p>
                   </a:txBody>
-                  <a:tcPr marL="0" marR="0" marT="0" marB="0" anchor="ctr">
+                  <a:tcPr marL="0" marR="0" marT="0" marB="0" anchor="b">
                     <a:lnL w="0" cap="flat" cmpd="sng" algn="ctr">
                       <a:solidFill>
                         <a:srgbClr val="99ACFF"/>
@@ -4254,7 +4254,7 @@
                       <a:endParaRPr lang="en-US" sz="2000"/>
                     </a:p>
                   </a:txBody>
-                  <a:tcPr marL="0" marR="0" marT="0" marB="0" anchor="ctr">
+                  <a:tcPr marL="0" marR="0" marT="0" marB="0" anchor="b">
                     <a:lnL w="0" cap="flat" cmpd="sng" algn="ctr">
                       <a:solidFill>
                         <a:srgbClr val="99ACFF"/>
@@ -4329,7 +4329,7 @@
                       <a:endParaRPr lang="en-US" sz="2000"/>
                     </a:p>
                   </a:txBody>
-                  <a:tcPr marL="0" marR="0" marT="0" marB="0" anchor="ctr">
+                  <a:tcPr marL="0" marR="0" marT="0" marB="0" anchor="b">
                     <a:lnL w="0" cap="flat" cmpd="sng" algn="ctr">
                       <a:solidFill>
                         <a:srgbClr val="99ACFF"/>
@@ -4394,7 +4394,7 @@
                       <a:endParaRPr lang="en-US" sz="2000"/>
                     </a:p>
                   </a:txBody>
-                  <a:tcPr marL="0" marR="0" marT="0" marB="0" anchor="ctr">
+                  <a:tcPr marL="0" marR="0" marT="0" marB="0" anchor="b">
                     <a:lnL w="0" cap="flat" cmpd="sng" algn="ctr">
                       <a:solidFill>
                         <a:srgbClr val="99ACFF"/>
@@ -4452,7 +4452,7 @@
                         <a:defRPr/>
                       </a:pPr>
                       <a:r>
-                        <a:rPr lang="en-US" sz="2100">
+                        <a:rPr lang="en-US" sz="2100" dirty="0">
                           <a:solidFill>
                             <a:srgbClr val="000000"/>
                           </a:solidFill>
@@ -4463,10 +4463,10 @@
                         </a:rPr>
                         <a:t>10 x 15</a:t>
                       </a:r>
-                      <a:endParaRPr lang="en-US" sz="2000"/>
+                      <a:endParaRPr lang="en-US" sz="2000" dirty="0"/>
                     </a:p>
                   </a:txBody>
-                  <a:tcPr marL="0" marR="0" marT="0" marB="0" anchor="ctr">
+                  <a:tcPr marL="0" marR="0" marT="0" marB="0" anchor="b">
                     <a:lnL w="0" cap="flat" cmpd="sng" algn="ctr">
                       <a:solidFill>
                         <a:srgbClr val="99ACFF"/>
@@ -4534,7 +4534,7 @@
                       <a:endParaRPr lang="en-US" sz="2000"/>
                     </a:p>
                   </a:txBody>
-                  <a:tcPr marL="0" marR="0" marT="0" marB="0" anchor="ctr">
+                  <a:tcPr marL="0" marR="0" marT="0" marB="0" anchor="b">
                     <a:lnL w="0" cap="flat" cmpd="sng" algn="ctr">
                       <a:solidFill>
                         <a:srgbClr val="99ACFF"/>
@@ -4609,7 +4609,7 @@
                       <a:endParaRPr lang="en-US" sz="2000"/>
                     </a:p>
                   </a:txBody>
-                  <a:tcPr marL="0" marR="0" marT="0" marB="0" anchor="ctr">
+                  <a:tcPr marL="0" marR="0" marT="0" marB="0" anchor="b">
                     <a:lnL w="0" cap="flat" cmpd="sng" algn="ctr">
                       <a:solidFill>
                         <a:srgbClr val="99ACFF"/>
@@ -4674,7 +4674,7 @@
                       <a:endParaRPr lang="en-US" sz="2000"/>
                     </a:p>
                   </a:txBody>
-                  <a:tcPr marL="0" marR="0" marT="0" marB="0" anchor="ctr">
+                  <a:tcPr marL="0" marR="0" marT="0" marB="0" anchor="b">
                     <a:lnL w="0" cap="flat" cmpd="sng" algn="ctr">
                       <a:solidFill>
                         <a:srgbClr val="99ACFF"/>
@@ -4732,7 +4732,7 @@
                         <a:defRPr/>
                       </a:pPr>
                       <a:r>
-                        <a:rPr lang="en-US" sz="2100" b="1">
+                        <a:rPr lang="en-US" sz="2100" b="1" dirty="0">
                           <a:solidFill>
                             <a:srgbClr val="000000"/>
                           </a:solidFill>
@@ -4743,10 +4743,10 @@
                         </a:rPr>
                         <a:t>AVG</a:t>
                       </a:r>
-                      <a:endParaRPr lang="en-US" sz="2000"/>
+                      <a:endParaRPr lang="en-US" sz="2000" dirty="0"/>
                     </a:p>
                   </a:txBody>
-                  <a:tcPr marL="0" marR="0" marT="0" marB="0" anchor="ctr">
+                  <a:tcPr marL="0" marR="0" marT="0" marB="0" anchor="b">
                     <a:lnL w="19050" cap="flat" cmpd="sng" algn="ctr">
                       <a:solidFill>
                         <a:srgbClr val="3B52A1"/>
@@ -4814,7 +4814,7 @@
                       <a:endParaRPr lang="en-US" sz="2000" dirty="0"/>
                     </a:p>
                   </a:txBody>
-                  <a:tcPr marL="0" marR="0" marT="0" marB="0" anchor="ctr">
+                  <a:tcPr marL="0" marR="0" marT="0" marB="0" anchor="b">
                     <a:lnL w="0" cap="flat" cmpd="sng" algn="ctr">
                       <a:solidFill>
                         <a:srgbClr val="99ACFF"/>
@@ -4875,14 +4875,14 @@
           <p:nvPr>
             <p:extLst>
               <p:ext uri="{D42A27DB-BD31-4B8C-83A1-F6EECF244321}">
-                <p14:modId xmlns:p14="http://schemas.microsoft.com/office/powerpoint/2010/main" val="2392714981"/>
+                <p14:modId xmlns:p14="http://schemas.microsoft.com/office/powerpoint/2010/main" val="1537978272"/>
               </p:ext>
             </p:extLst>
           </p:nvPr>
         </p:nvGraphicFramePr>
         <p:xfrm>
           <a:off x="12529409" y="1676400"/>
-          <a:ext cx="4946256" cy="2388193"/>
+          <a:ext cx="4946256" cy="2353832"/>
         </p:xfrm>
         <a:graphic>
           <a:graphicData uri="http://schemas.openxmlformats.org/drawingml/2006/table">
@@ -5190,7 +5190,7 @@
                   </a:ext>
                 </a:extLst>
               </a:tr>
-              <a:tr h="491561">
+              <a:tr h="457200">
                 <a:tc>
                   <a:txBody>
                     <a:bodyPr/>
@@ -5203,7 +5203,7 @@
                         <a:defRPr/>
                       </a:pPr>
                       <a:r>
-                        <a:rPr lang="en-US" sz="1400" b="1">
+                        <a:rPr lang="en-US" sz="1400" b="1" dirty="0">
                           <a:solidFill>
                             <a:srgbClr val="000000"/>
                           </a:solidFill>
@@ -5214,7 +5214,7 @@
                         </a:rPr>
                         <a:t>Online Rate </a:t>
                       </a:r>
-                      <a:endParaRPr lang="en-US" sz="2000"/>
+                      <a:endParaRPr lang="en-US" sz="2000" dirty="0"/>
                     </a:p>
                     <a:p>
                       <a:pPr algn="ctr">
@@ -5222,8 +5222,24 @@
                           <a:spcPts val="840"/>
                         </a:lnSpc>
                       </a:pPr>
-                      <a:r>
-                        <a:rPr lang="en-US" sz="1100">
+                      <a:endParaRPr lang="en-US" sz="1100" dirty="0">
+                        <a:solidFill>
+                          <a:srgbClr val="000000"/>
+                        </a:solidFill>
+                        <a:latin typeface="Avenir"/>
+                        <a:ea typeface="Avenir"/>
+                        <a:cs typeface="Avenir"/>
+                        <a:sym typeface="Avenir"/>
+                      </a:endParaRPr>
+                    </a:p>
+                    <a:p>
+                      <a:pPr algn="ctr">
+                        <a:lnSpc>
+                          <a:spcPts val="840"/>
+                        </a:lnSpc>
+                      </a:pPr>
+                      <a:r>
+                        <a:rPr lang="en-US" sz="1100" dirty="0">
                           <a:solidFill>
                             <a:srgbClr val="000000"/>
                           </a:solidFill>
@@ -5232,7 +5248,31 @@
                           <a:cs typeface="Avenir"/>
                           <a:sym typeface="Avenir"/>
                         </a:rPr>
-                        <a:t>($/SqFt)</a:t>
+                        <a:t>($/</a:t>
+                      </a:r>
+                      <a:r>
+                        <a:rPr lang="en-US" sz="1100" dirty="0" err="1">
+                          <a:solidFill>
+                            <a:srgbClr val="000000"/>
+                          </a:solidFill>
+                          <a:latin typeface="Avenir"/>
+                          <a:ea typeface="Avenir"/>
+                          <a:cs typeface="Avenir"/>
+                          <a:sym typeface="Avenir"/>
+                        </a:rPr>
+                        <a:t>SqFt</a:t>
+                      </a:r>
+                      <a:r>
+                        <a:rPr lang="en-US" sz="1100" dirty="0">
+                          <a:solidFill>
+                            <a:srgbClr val="000000"/>
+                          </a:solidFill>
+                          <a:latin typeface="Avenir"/>
+                          <a:ea typeface="Avenir"/>
+                          <a:cs typeface="Avenir"/>
+                          <a:sym typeface="Avenir"/>
+                        </a:rPr>
+                        <a:t>)</a:t>
                       </a:r>
                     </a:p>
                   </a:txBody>
@@ -5290,7 +5330,7 @@
                         <a:defRPr/>
                       </a:pPr>
                       <a:r>
-                        <a:rPr lang="en-US" sz="1400" b="1">
+                        <a:rPr lang="en-US" sz="1400" b="1" dirty="0">
                           <a:solidFill>
                             <a:srgbClr val="000000"/>
                           </a:solidFill>
@@ -5301,7 +5341,7 @@
                         </a:rPr>
                         <a:t>Online Rate </a:t>
                       </a:r>
-                      <a:endParaRPr lang="en-US" sz="2000"/>
+                      <a:endParaRPr lang="en-US" sz="2000" dirty="0"/>
                     </a:p>
                     <a:p>
                       <a:pPr algn="ctr">
@@ -5309,8 +5349,24 @@
                           <a:spcPts val="840"/>
                         </a:lnSpc>
                       </a:pPr>
-                      <a:r>
-                        <a:rPr lang="en-US" sz="1100">
+                      <a:endParaRPr lang="en-US" sz="1100" dirty="0">
+                        <a:solidFill>
+                          <a:srgbClr val="000000"/>
+                        </a:solidFill>
+                        <a:latin typeface="Avenir"/>
+                        <a:ea typeface="Avenir"/>
+                        <a:cs typeface="Avenir"/>
+                        <a:sym typeface="Avenir"/>
+                      </a:endParaRPr>
+                    </a:p>
+                    <a:p>
+                      <a:pPr algn="ctr">
+                        <a:lnSpc>
+                          <a:spcPts val="840"/>
+                        </a:lnSpc>
+                      </a:pPr>
+                      <a:r>
+                        <a:rPr lang="en-US" sz="1100" dirty="0">
                           <a:solidFill>
                             <a:srgbClr val="000000"/>
                           </a:solidFill>
@@ -5319,7 +5375,31 @@
                           <a:cs typeface="Avenir"/>
                           <a:sym typeface="Avenir"/>
                         </a:rPr>
-                        <a:t>($/SqFt)</a:t>
+                        <a:t>($/</a:t>
+                      </a:r>
+                      <a:r>
+                        <a:rPr lang="en-US" sz="1100" dirty="0" err="1">
+                          <a:solidFill>
+                            <a:srgbClr val="000000"/>
+                          </a:solidFill>
+                          <a:latin typeface="Avenir"/>
+                          <a:ea typeface="Avenir"/>
+                          <a:cs typeface="Avenir"/>
+                          <a:sym typeface="Avenir"/>
+                        </a:rPr>
+                        <a:t>SqFt</a:t>
+                      </a:r>
+                      <a:r>
+                        <a:rPr lang="en-US" sz="1100" dirty="0">
+                          <a:solidFill>
+                            <a:srgbClr val="000000"/>
+                          </a:solidFill>
+                          <a:latin typeface="Avenir"/>
+                          <a:ea typeface="Avenir"/>
+                          <a:cs typeface="Avenir"/>
+                          <a:sym typeface="Avenir"/>
+                        </a:rPr>
+                        <a:t>)</a:t>
                       </a:r>
                     </a:p>
                   </a:txBody>
@@ -5384,7 +5464,7 @@
                         <a:defRPr/>
                       </a:pPr>
                       <a:r>
-                        <a:rPr lang="en-US" sz="2700" b="1">
+                        <a:rPr lang="en-US" sz="2700" b="1" dirty="0">
                           <a:solidFill>
                             <a:srgbClr val="000000"/>
                           </a:solidFill>
@@ -5395,7 +5475,7 @@
                         </a:rPr>
                         <a:t>{{MRSFIRST}}</a:t>
                       </a:r>
-                      <a:endParaRPr lang="en-US" sz="2000"/>
+                      <a:endParaRPr lang="en-US" sz="2000" dirty="0"/>
                     </a:p>
                   </a:txBody>
                   <a:tcPr marL="0" marR="0" marT="0" marB="0" anchor="ctr">
@@ -5971,7 +6051,7 @@
           <p:nvPr>
             <p:extLst>
               <p:ext uri="{D42A27DB-BD31-4B8C-83A1-F6EECF244321}">
-                <p14:modId xmlns:p14="http://schemas.microsoft.com/office/powerpoint/2010/main" val="3025097578"/>
+                <p14:modId xmlns:p14="http://schemas.microsoft.com/office/powerpoint/2010/main" val="1550037274"/>
               </p:ext>
             </p:extLst>
           </p:nvPr>
@@ -6156,7 +6236,7 @@
                         <a:defRPr/>
                       </a:pPr>
                       <a:r>
-                        <a:rPr lang="en-US" sz="1400">
+                        <a:rPr lang="en-US" sz="1400" dirty="0">
                           <a:solidFill>
                             <a:srgbClr val="000000"/>
                           </a:solidFill>
@@ -6167,10 +6247,10 @@
                         </a:rPr>
                         <a:t>{{PP4ADDRESS}}</a:t>
                       </a:r>
-                      <a:endParaRPr lang="en-US" sz="2000"/>
+                      <a:endParaRPr lang="en-US" sz="2000" dirty="0"/>
                     </a:p>
                   </a:txBody>
-                  <a:tcPr marL="0" marR="0" marT="0" marB="0" anchor="ctr">
+                  <a:tcPr marL="0" marR="0" marT="0" marB="0" anchor="b">
                     <a:lnL w="0" cap="flat" cmpd="sng" algn="ctr">
                       <a:solidFill>
                         <a:srgbClr val="99ACFF"/>
@@ -6299,7 +6379,7 @@
                         <a:defRPr/>
                       </a:pPr>
                       <a:r>
-                        <a:rPr lang="en-US" sz="1200">
+                        <a:rPr lang="en-US" sz="1200" dirty="0">
                           <a:solidFill>
                             <a:srgbClr val="4A4A4A"/>
                           </a:solidFill>
@@ -6308,9 +6388,9 @@
                           <a:cs typeface="Avenir"/>
                           <a:sym typeface="Avenir"/>
                         </a:rPr>
-                        <a:t>X Miles Away</a:t>
-                      </a:r>
-                      <a:endParaRPr lang="en-US" sz="2000"/>
+                        <a:t>{{PP4DIST}} Miles Away</a:t>
+                      </a:r>
+                      <a:endParaRPr lang="en-US" sz="2000" dirty="0"/>
                     </a:p>
                   </a:txBody>
                   <a:tcPr marL="0" marR="0" marT="0" marB="0" anchor="ctr">
@@ -6585,7 +6665,7 @@
                         <a:defRPr/>
                       </a:pPr>
                       <a:r>
-                        <a:rPr lang="en-US" sz="2100" b="1">
+                        <a:rPr lang="en-US" sz="2100" b="1" dirty="0">
                           <a:solidFill>
                             <a:srgbClr val="FFFFFF"/>
                           </a:solidFill>
@@ -6596,10 +6676,10 @@
                         </a:rPr>
                         <a:t>Unit Size</a:t>
                       </a:r>
-                      <a:endParaRPr lang="en-US" sz="2000"/>
+                      <a:endParaRPr lang="en-US" sz="2000" dirty="0"/>
                     </a:p>
                   </a:txBody>
-                  <a:tcPr marL="0" marR="0" marT="0" marB="0" anchor="ctr">
+                  <a:tcPr marL="0" marR="0" marT="0" marB="0" anchor="b">
                     <a:lnL w="0" cap="flat" cmpd="sng" algn="ctr">
                       <a:solidFill>
                         <a:srgbClr val="99ACFF"/>
@@ -6667,7 +6747,7 @@
                       <a:endParaRPr lang="en-US" sz="2000"/>
                     </a:p>
                   </a:txBody>
-                  <a:tcPr marL="0" marR="0" marT="0" marB="0" anchor="ctr">
+                  <a:tcPr marL="0" marR="0" marT="0" marB="0" anchor="b">
                     <a:lnL w="0" cap="flat" cmpd="sng" algn="ctr">
                       <a:solidFill>
                         <a:srgbClr val="99ACFF"/>
@@ -6728,7 +6808,7 @@
                         <a:defRPr/>
                       </a:pPr>
                       <a:r>
-                        <a:rPr lang="en-US" sz="2100">
+                        <a:rPr lang="en-US" sz="2100" dirty="0">
                           <a:solidFill>
                             <a:srgbClr val="000000"/>
                           </a:solidFill>
@@ -6739,10 +6819,10 @@
                         </a:rPr>
                         <a:t>5 x 5</a:t>
                       </a:r>
-                      <a:endParaRPr lang="en-US" sz="2000"/>
+                      <a:endParaRPr lang="en-US" sz="2000" dirty="0"/>
                     </a:p>
                   </a:txBody>
-                  <a:tcPr marL="0" marR="0" marT="0" marB="0" anchor="ctr">
+                  <a:tcPr marL="0" marR="0" marT="0" marB="0" anchor="b">
                     <a:lnL w="0" cap="flat" cmpd="sng" algn="ctr">
                       <a:solidFill>
                         <a:srgbClr val="99ACFF"/>
@@ -6807,7 +6887,7 @@
                       <a:endParaRPr lang="en-US" sz="2000"/>
                     </a:p>
                   </a:txBody>
-                  <a:tcPr marL="0" marR="0" marT="0" marB="0" anchor="ctr">
+                  <a:tcPr marL="0" marR="0" marT="0" marB="0" anchor="b">
                     <a:lnL w="0" cap="flat" cmpd="sng" algn="ctr">
                       <a:solidFill>
                         <a:srgbClr val="99ACFF"/>
@@ -6865,7 +6945,7 @@
                         <a:defRPr/>
                       </a:pPr>
                       <a:r>
-                        <a:rPr lang="en-US" sz="2100">
+                        <a:rPr lang="en-US" sz="2100" dirty="0">
                           <a:solidFill>
                             <a:srgbClr val="000000"/>
                           </a:solidFill>
@@ -6876,10 +6956,10 @@
                         </a:rPr>
                         <a:t>5 x 10</a:t>
                       </a:r>
-                      <a:endParaRPr lang="en-US" sz="2000"/>
+                      <a:endParaRPr lang="en-US" sz="2000" dirty="0"/>
                     </a:p>
                   </a:txBody>
-                  <a:tcPr marL="0" marR="0" marT="0" marB="0" anchor="ctr">
+                  <a:tcPr marL="0" marR="0" marT="0" marB="0" anchor="b">
                     <a:lnL w="0" cap="flat" cmpd="sng" algn="ctr">
                       <a:solidFill>
                         <a:srgbClr val="99ACFF"/>
@@ -6947,7 +7027,7 @@
                       <a:endParaRPr lang="en-US" sz="2000"/>
                     </a:p>
                   </a:txBody>
-                  <a:tcPr marL="0" marR="0" marT="0" marB="0" anchor="ctr">
+                  <a:tcPr marL="0" marR="0" marT="0" marB="0" anchor="b">
                     <a:lnL w="0" cap="flat" cmpd="sng" algn="ctr">
                       <a:solidFill>
                         <a:srgbClr val="99ACFF"/>
@@ -7008,7 +7088,7 @@
                         <a:defRPr/>
                       </a:pPr>
                       <a:r>
-                        <a:rPr lang="en-US" sz="2100">
+                        <a:rPr lang="en-US" sz="2100" dirty="0">
                           <a:solidFill>
                             <a:srgbClr val="000000"/>
                           </a:solidFill>
@@ -7019,10 +7099,10 @@
                         </a:rPr>
                         <a:t>10 x 10</a:t>
                       </a:r>
-                      <a:endParaRPr lang="en-US" sz="2000"/>
+                      <a:endParaRPr lang="en-US" sz="2000" dirty="0"/>
                     </a:p>
                   </a:txBody>
-                  <a:tcPr marL="0" marR="0" marT="0" marB="0" anchor="ctr">
+                  <a:tcPr marL="0" marR="0" marT="0" marB="0" anchor="b">
                     <a:lnL w="0" cap="flat" cmpd="sng" algn="ctr">
                       <a:solidFill>
                         <a:srgbClr val="99ACFF"/>
@@ -7087,7 +7167,7 @@
                       <a:endParaRPr lang="en-US" sz="2000"/>
                     </a:p>
                   </a:txBody>
-                  <a:tcPr marL="0" marR="0" marT="0" marB="0" anchor="ctr">
+                  <a:tcPr marL="0" marR="0" marT="0" marB="0" anchor="b">
                     <a:lnL w="0" cap="flat" cmpd="sng" algn="ctr">
                       <a:solidFill>
                         <a:srgbClr val="99ACFF"/>
@@ -7145,7 +7225,7 @@
                         <a:defRPr/>
                       </a:pPr>
                       <a:r>
-                        <a:rPr lang="en-US" sz="2100">
+                        <a:rPr lang="en-US" sz="2100" dirty="0">
                           <a:solidFill>
                             <a:srgbClr val="000000"/>
                           </a:solidFill>
@@ -7156,10 +7236,10 @@
                         </a:rPr>
                         <a:t>10 x 15</a:t>
                       </a:r>
-                      <a:endParaRPr lang="en-US" sz="2000"/>
+                      <a:endParaRPr lang="en-US" sz="2000" dirty="0"/>
                     </a:p>
                   </a:txBody>
-                  <a:tcPr marL="0" marR="0" marT="0" marB="0" anchor="ctr">
+                  <a:tcPr marL="0" marR="0" marT="0" marB="0" anchor="b">
                     <a:lnL w="0" cap="flat" cmpd="sng" algn="ctr">
                       <a:solidFill>
                         <a:srgbClr val="99ACFF"/>
@@ -7227,7 +7307,7 @@
                       <a:endParaRPr lang="en-US" sz="2000"/>
                     </a:p>
                   </a:txBody>
-                  <a:tcPr marL="0" marR="0" marT="0" marB="0" anchor="ctr">
+                  <a:tcPr marL="0" marR="0" marT="0" marB="0" anchor="b">
                     <a:lnL w="0" cap="flat" cmpd="sng" algn="ctr">
                       <a:solidFill>
                         <a:srgbClr val="99ACFF"/>
@@ -7288,7 +7368,7 @@
                         <a:defRPr/>
                       </a:pPr>
                       <a:r>
-                        <a:rPr lang="en-US" sz="2100">
+                        <a:rPr lang="en-US" sz="2100" dirty="0">
                           <a:solidFill>
                             <a:srgbClr val="000000"/>
                           </a:solidFill>
@@ -7299,10 +7379,10 @@
                         </a:rPr>
                         <a:t>10 x 20</a:t>
                       </a:r>
-                      <a:endParaRPr lang="en-US" sz="2000"/>
+                      <a:endParaRPr lang="en-US" sz="2000" dirty="0"/>
                     </a:p>
                   </a:txBody>
-                  <a:tcPr marL="0" marR="0" marT="0" marB="0" anchor="ctr">
+                  <a:tcPr marL="0" marR="0" marT="0" marB="0" anchor="b">
                     <a:lnL w="0" cap="flat" cmpd="sng" algn="ctr">
                       <a:solidFill>
                         <a:srgbClr val="99ACFF"/>
@@ -7367,7 +7447,7 @@
                       <a:endParaRPr lang="en-US" sz="2000"/>
                     </a:p>
                   </a:txBody>
-                  <a:tcPr marL="0" marR="0" marT="0" marB="0" anchor="ctr">
+                  <a:tcPr marL="0" marR="0" marT="0" marB="0" anchor="b">
                     <a:lnL w="0" cap="flat" cmpd="sng" algn="ctr">
                       <a:solidFill>
                         <a:srgbClr val="99ACFF"/>
@@ -7425,7 +7505,7 @@
                         <a:defRPr/>
                       </a:pPr>
                       <a:r>
-                        <a:rPr lang="en-US" sz="2100" b="1">
+                        <a:rPr lang="en-US" sz="2100" b="1" dirty="0">
                           <a:solidFill>
                             <a:srgbClr val="000000"/>
                           </a:solidFill>
@@ -7436,10 +7516,10 @@
                         </a:rPr>
                         <a:t>AVG</a:t>
                       </a:r>
-                      <a:endParaRPr lang="en-US" sz="2000"/>
+                      <a:endParaRPr lang="en-US" sz="2000" dirty="0"/>
                     </a:p>
                   </a:txBody>
-                  <a:tcPr marL="0" marR="0" marT="0" marB="0" anchor="ctr">
+                  <a:tcPr marL="0" marR="0" marT="0" marB="0" anchor="b">
                     <a:lnL w="19050" cap="flat" cmpd="sng" algn="ctr">
                       <a:solidFill>
                         <a:srgbClr val="3B52A1"/>
@@ -7507,7 +7587,7 @@
                       <a:endParaRPr lang="en-US" sz="2000" dirty="0"/>
                     </a:p>
                   </a:txBody>
-                  <a:tcPr marL="0" marR="0" marT="0" marB="0" anchor="ctr">
+                  <a:tcPr marL="0" marR="0" marT="0" marB="0" anchor="b">
                     <a:lnL w="0" cap="flat" cmpd="sng" algn="ctr">
                       <a:solidFill>
                         <a:srgbClr val="99ACFF"/>
@@ -7568,7 +7648,7 @@
           <p:nvPr>
             <p:extLst>
               <p:ext uri="{D42A27DB-BD31-4B8C-83A1-F6EECF244321}">
-                <p14:modId xmlns:p14="http://schemas.microsoft.com/office/powerpoint/2010/main" val="3211735350"/>
+                <p14:modId xmlns:p14="http://schemas.microsoft.com/office/powerpoint/2010/main" val="1168392661"/>
               </p:ext>
             </p:extLst>
           </p:nvPr>
@@ -7753,7 +7833,7 @@
                         <a:defRPr/>
                       </a:pPr>
                       <a:r>
-                        <a:rPr lang="en-US" sz="1400">
+                        <a:rPr lang="en-US" sz="1400" dirty="0">
                           <a:solidFill>
                             <a:srgbClr val="000000"/>
                           </a:solidFill>
@@ -7764,10 +7844,10 @@
                         </a:rPr>
                         <a:t>{{PP2ADDRESS}}</a:t>
                       </a:r>
-                      <a:endParaRPr lang="en-US" sz="2000"/>
+                      <a:endParaRPr lang="en-US" sz="2000" dirty="0"/>
                     </a:p>
                   </a:txBody>
-                  <a:tcPr marL="0" marR="0" marT="0" marB="0" anchor="ctr">
+                  <a:tcPr marL="0" marR="0" marT="0" marB="0" anchor="b">
                     <a:lnL w="0" cap="flat" cmpd="sng" algn="ctr">
                       <a:solidFill>
                         <a:srgbClr val="99ACFF"/>
@@ -7896,7 +7976,7 @@
                         <a:defRPr/>
                       </a:pPr>
                       <a:r>
-                        <a:rPr lang="en-US" sz="1200">
+                        <a:rPr lang="en-US" sz="1200" dirty="0">
                           <a:solidFill>
                             <a:srgbClr val="4A4A4A"/>
                           </a:solidFill>
@@ -7905,9 +7985,9 @@
                           <a:cs typeface="Avenir"/>
                           <a:sym typeface="Avenir"/>
                         </a:rPr>
-                        <a:t>X Miles Away</a:t>
-                      </a:r>
-                      <a:endParaRPr lang="en-US" sz="2000"/>
+                        <a:t>{{PP2DIST}} Miles Away</a:t>
+                      </a:r>
+                      <a:endParaRPr lang="en-US" sz="2000" dirty="0"/>
                     </a:p>
                   </a:txBody>
                   <a:tcPr marL="0" marR="0" marT="0" marB="0" anchor="ctr">
@@ -8182,7 +8262,7 @@
                         <a:defRPr/>
                       </a:pPr>
                       <a:r>
-                        <a:rPr lang="en-US" sz="2100" b="1">
+                        <a:rPr lang="en-US" sz="2100" b="1" dirty="0">
                           <a:solidFill>
                             <a:srgbClr val="FFFFFF"/>
                           </a:solidFill>
@@ -8193,10 +8273,10 @@
                         </a:rPr>
                         <a:t>Unit Size</a:t>
                       </a:r>
-                      <a:endParaRPr lang="en-US" sz="2000"/>
+                      <a:endParaRPr lang="en-US" sz="2000" dirty="0"/>
                     </a:p>
                   </a:txBody>
-                  <a:tcPr marL="0" marR="0" marT="0" marB="0" anchor="ctr">
+                  <a:tcPr marL="0" marR="0" marT="0" marB="0" anchor="b">
                     <a:lnL w="0" cap="flat" cmpd="sng" algn="ctr">
                       <a:solidFill>
                         <a:srgbClr val="99ACFF"/>
@@ -8250,7 +8330,7 @@
                         <a:defRPr/>
                       </a:pPr>
                       <a:r>
-                        <a:rPr lang="en-US" sz="2100" b="1">
+                        <a:rPr lang="en-US" sz="2100" b="1" dirty="0">
                           <a:solidFill>
                             <a:srgbClr val="FFFFFF"/>
                           </a:solidFill>
@@ -8259,12 +8339,24 @@
                           <a:cs typeface="Avenir Bold"/>
                           <a:sym typeface="Avenir Bold"/>
                         </a:rPr>
-                        <a:t>$/sqft</a:t>
-                      </a:r>
-                      <a:endParaRPr lang="en-US" sz="2000"/>
+                        <a:t>$/</a:t>
+                      </a:r>
+                      <a:r>
+                        <a:rPr lang="en-US" sz="2100" b="1" dirty="0" err="1">
+                          <a:solidFill>
+                            <a:srgbClr val="FFFFFF"/>
+                          </a:solidFill>
+                          <a:latin typeface="Avenir Bold"/>
+                          <a:ea typeface="Avenir Bold"/>
+                          <a:cs typeface="Avenir Bold"/>
+                          <a:sym typeface="Avenir Bold"/>
+                        </a:rPr>
+                        <a:t>sqft</a:t>
+                      </a:r>
+                      <a:endParaRPr lang="en-US" sz="2000" dirty="0"/>
                     </a:p>
                   </a:txBody>
-                  <a:tcPr marL="0" marR="0" marT="0" marB="0" anchor="ctr">
+                  <a:tcPr marL="0" marR="0" marT="0" marB="0" anchor="b">
                     <a:lnL w="0" cap="flat" cmpd="sng" algn="ctr">
                       <a:solidFill>
                         <a:srgbClr val="99ACFF"/>
@@ -8325,7 +8417,7 @@
                         <a:defRPr/>
                       </a:pPr>
                       <a:r>
-                        <a:rPr lang="en-US" sz="2100">
+                        <a:rPr lang="en-US" sz="2100" dirty="0">
                           <a:solidFill>
                             <a:srgbClr val="000000"/>
                           </a:solidFill>
@@ -8336,10 +8428,10 @@
                         </a:rPr>
                         <a:t>5 x 5</a:t>
                       </a:r>
-                      <a:endParaRPr lang="en-US" sz="2000"/>
+                      <a:endParaRPr lang="en-US" sz="2000" dirty="0"/>
                     </a:p>
                   </a:txBody>
-                  <a:tcPr marL="0" marR="0" marT="0" marB="0" anchor="ctr">
+                  <a:tcPr marL="0" marR="0" marT="0" marB="0" anchor="b">
                     <a:lnL w="0" cap="flat" cmpd="sng" algn="ctr">
                       <a:solidFill>
                         <a:srgbClr val="99ACFF"/>
@@ -8390,7 +8482,7 @@
                         <a:defRPr/>
                       </a:pPr>
                       <a:r>
-                        <a:rPr lang="en-US" sz="2100">
+                        <a:rPr lang="en-US" sz="2100" dirty="0">
                           <a:solidFill>
                             <a:srgbClr val="000000"/>
                           </a:solidFill>
@@ -8401,10 +8493,10 @@
                         </a:rPr>
                         <a:t>{{PP2X25}}</a:t>
                       </a:r>
-                      <a:endParaRPr lang="en-US" sz="2000"/>
+                      <a:endParaRPr lang="en-US" sz="2000" dirty="0"/>
                     </a:p>
                   </a:txBody>
-                  <a:tcPr marL="0" marR="0" marT="0" marB="0" anchor="ctr">
+                  <a:tcPr marL="0" marR="0" marT="0" marB="0" anchor="b">
                     <a:lnL w="0" cap="flat" cmpd="sng" algn="ctr">
                       <a:solidFill>
                         <a:srgbClr val="99ACFF"/>
@@ -8462,7 +8554,7 @@
                         <a:defRPr/>
                       </a:pPr>
                       <a:r>
-                        <a:rPr lang="en-US" sz="2100">
+                        <a:rPr lang="en-US" sz="2100" dirty="0">
                           <a:solidFill>
                             <a:srgbClr val="000000"/>
                           </a:solidFill>
@@ -8473,10 +8565,10 @@
                         </a:rPr>
                         <a:t>5 x 10</a:t>
                       </a:r>
-                      <a:endParaRPr lang="en-US" sz="2000"/>
+                      <a:endParaRPr lang="en-US" sz="2000" dirty="0"/>
                     </a:p>
                   </a:txBody>
-                  <a:tcPr marL="0" marR="0" marT="0" marB="0" anchor="ctr">
+                  <a:tcPr marL="0" marR="0" marT="0" marB="0" anchor="b">
                     <a:lnL w="0" cap="flat" cmpd="sng" algn="ctr">
                       <a:solidFill>
                         <a:srgbClr val="99ACFF"/>
@@ -8530,7 +8622,7 @@
                         <a:defRPr/>
                       </a:pPr>
                       <a:r>
-                        <a:rPr lang="en-US" sz="2100">
+                        <a:rPr lang="en-US" sz="2100" dirty="0">
                           <a:solidFill>
                             <a:srgbClr val="000000"/>
                           </a:solidFill>
@@ -8541,10 +8633,10 @@
                         </a:rPr>
                         <a:t>{{PP2X50}}</a:t>
                       </a:r>
-                      <a:endParaRPr lang="en-US" sz="2000"/>
+                      <a:endParaRPr lang="en-US" sz="2000" dirty="0"/>
                     </a:p>
                   </a:txBody>
-                  <a:tcPr marL="0" marR="0" marT="0" marB="0" anchor="ctr">
+                  <a:tcPr marL="0" marR="0" marT="0" marB="0" anchor="b">
                     <a:lnL w="0" cap="flat" cmpd="sng" algn="ctr">
                       <a:solidFill>
                         <a:srgbClr val="99ACFF"/>
@@ -8619,7 +8711,7 @@
                       <a:endParaRPr lang="en-US" sz="2000"/>
                     </a:p>
                   </a:txBody>
-                  <a:tcPr marL="0" marR="0" marT="0" marB="0" anchor="ctr">
+                  <a:tcPr marL="0" marR="0" marT="0" marB="0" anchor="b">
                     <a:lnL w="0" cap="flat" cmpd="sng" algn="ctr">
                       <a:solidFill>
                         <a:srgbClr val="99ACFF"/>
@@ -8670,7 +8762,7 @@
                         <a:defRPr/>
                       </a:pPr>
                       <a:r>
-                        <a:rPr lang="en-US" sz="2100">
+                        <a:rPr lang="en-US" sz="2100" dirty="0">
                           <a:solidFill>
                             <a:srgbClr val="000000"/>
                           </a:solidFill>
@@ -8681,10 +8773,10 @@
                         </a:rPr>
                         <a:t>{{PP2X100}}</a:t>
                       </a:r>
-                      <a:endParaRPr lang="en-US" sz="2000"/>
+                      <a:endParaRPr lang="en-US" sz="2000" dirty="0"/>
                     </a:p>
                   </a:txBody>
-                  <a:tcPr marL="0" marR="0" marT="0" marB="0" anchor="ctr">
+                  <a:tcPr marL="0" marR="0" marT="0" marB="0" anchor="b">
                     <a:lnL w="0" cap="flat" cmpd="sng" algn="ctr">
                       <a:solidFill>
                         <a:srgbClr val="99ACFF"/>
@@ -8756,7 +8848,7 @@
                       <a:endParaRPr lang="en-US" sz="2000"/>
                     </a:p>
                   </a:txBody>
-                  <a:tcPr marL="0" marR="0" marT="0" marB="0" anchor="ctr">
+                  <a:tcPr marL="0" marR="0" marT="0" marB="0" anchor="b">
                     <a:lnL w="0" cap="flat" cmpd="sng" algn="ctr">
                       <a:solidFill>
                         <a:srgbClr val="99ACFF"/>
@@ -8810,7 +8902,7 @@
                         <a:defRPr/>
                       </a:pPr>
                       <a:r>
-                        <a:rPr lang="en-US" sz="2100">
+                        <a:rPr lang="en-US" sz="2100" dirty="0">
                           <a:solidFill>
                             <a:srgbClr val="000000"/>
                           </a:solidFill>
@@ -8821,10 +8913,10 @@
                         </a:rPr>
                         <a:t>{{PP2X150}}</a:t>
                       </a:r>
-                      <a:endParaRPr lang="en-US" sz="2000"/>
+                      <a:endParaRPr lang="en-US" sz="2000" dirty="0"/>
                     </a:p>
                   </a:txBody>
-                  <a:tcPr marL="0" marR="0" marT="0" marB="0" anchor="ctr">
+                  <a:tcPr marL="0" marR="0" marT="0" marB="0" anchor="b">
                     <a:lnL w="0" cap="flat" cmpd="sng" algn="ctr">
                       <a:solidFill>
                         <a:srgbClr val="99ACFF"/>
@@ -8899,7 +8991,7 @@
                       <a:endParaRPr lang="en-US" sz="2000"/>
                     </a:p>
                   </a:txBody>
-                  <a:tcPr marL="0" marR="0" marT="0" marB="0" anchor="ctr">
+                  <a:tcPr marL="0" marR="0" marT="0" marB="0" anchor="b">
                     <a:lnL w="0" cap="flat" cmpd="sng" algn="ctr">
                       <a:solidFill>
                         <a:srgbClr val="99ACFF"/>
@@ -8950,7 +9042,7 @@
                         <a:defRPr/>
                       </a:pPr>
                       <a:r>
-                        <a:rPr lang="en-US" sz="2100">
+                        <a:rPr lang="en-US" sz="2100" dirty="0">
                           <a:solidFill>
                             <a:srgbClr val="000000"/>
                           </a:solidFill>
@@ -8961,10 +9053,10 @@
                         </a:rPr>
                         <a:t>{{PP2X200}}</a:t>
                       </a:r>
-                      <a:endParaRPr lang="en-US" sz="2000"/>
+                      <a:endParaRPr lang="en-US" sz="2000" dirty="0"/>
                     </a:p>
                   </a:txBody>
-                  <a:tcPr marL="0" marR="0" marT="0" marB="0" anchor="ctr">
+                  <a:tcPr marL="0" marR="0" marT="0" marB="0" anchor="b">
                     <a:lnL w="0" cap="flat" cmpd="sng" algn="ctr">
                       <a:solidFill>
                         <a:srgbClr val="99ACFF"/>
@@ -9036,7 +9128,7 @@
                       <a:endParaRPr lang="en-US" sz="2000"/>
                     </a:p>
                   </a:txBody>
-                  <a:tcPr marL="0" marR="0" marT="0" marB="0" anchor="ctr">
+                  <a:tcPr marL="0" marR="0" marT="0" marB="0" anchor="b">
                     <a:lnL w="19050" cap="flat" cmpd="sng" algn="ctr">
                       <a:solidFill>
                         <a:srgbClr val="3B52A1"/>
@@ -9104,7 +9196,7 @@
                       <a:endParaRPr lang="en-US" sz="2000" dirty="0"/>
                     </a:p>
                   </a:txBody>
-                  <a:tcPr marL="0" marR="0" marT="0" marB="0" anchor="ctr">
+                  <a:tcPr marL="0" marR="0" marT="0" marB="0" anchor="b">
                     <a:lnL w="0" cap="flat" cmpd="sng" algn="ctr">
                       <a:solidFill>
                         <a:srgbClr val="99ACFF"/>
@@ -9165,7 +9257,7 @@
           <p:nvPr>
             <p:extLst>
               <p:ext uri="{D42A27DB-BD31-4B8C-83A1-F6EECF244321}">
-                <p14:modId xmlns:p14="http://schemas.microsoft.com/office/powerpoint/2010/main" val="34692634"/>
+                <p14:modId xmlns:p14="http://schemas.microsoft.com/office/powerpoint/2010/main" val="1760523378"/>
               </p:ext>
             </p:extLst>
           </p:nvPr>
@@ -9364,7 +9456,7 @@
                       <a:endParaRPr lang="en-US" sz="2000" dirty="0"/>
                     </a:p>
                   </a:txBody>
-                  <a:tcPr marL="0" marR="0" marT="0" marB="0" anchor="ctr">
+                  <a:tcPr marL="0" marR="0" marT="0" marB="0" anchor="b">
                     <a:lnL w="0" cap="flat" cmpd="sng" algn="ctr">
                       <a:solidFill>
                         <a:srgbClr val="99ACFF"/>
@@ -9502,7 +9594,7 @@
                           <a:cs typeface="Avenir"/>
                           <a:sym typeface="Avenir"/>
                         </a:rPr>
-                        <a:t>X Miles Away</a:t>
+                        <a:t>{{PP5DIST}} Miles Away</a:t>
                       </a:r>
                       <a:endParaRPr lang="en-US" sz="2000" dirty="0"/>
                     </a:p>
@@ -9779,7 +9871,7 @@
                         <a:defRPr/>
                       </a:pPr>
                       <a:r>
-                        <a:rPr lang="en-US" sz="2100" b="1">
+                        <a:rPr lang="en-US" sz="2100" b="1" dirty="0">
                           <a:solidFill>
                             <a:srgbClr val="FFFFFF"/>
                           </a:solidFill>
@@ -9790,10 +9882,10 @@
                         </a:rPr>
                         <a:t>Unit Size</a:t>
                       </a:r>
-                      <a:endParaRPr lang="en-US" sz="2000"/>
+                      <a:endParaRPr lang="en-US" sz="2000" dirty="0"/>
                     </a:p>
                   </a:txBody>
-                  <a:tcPr marL="0" marR="0" marT="0" marB="0" anchor="ctr">
+                  <a:tcPr marL="0" marR="0" marT="0" marB="0" anchor="b">
                     <a:lnL w="0" cap="flat" cmpd="sng" algn="ctr">
                       <a:solidFill>
                         <a:srgbClr val="99ACFF"/>
@@ -9861,7 +9953,7 @@
                       <a:endParaRPr lang="en-US" sz="2000"/>
                     </a:p>
                   </a:txBody>
-                  <a:tcPr marL="0" marR="0" marT="0" marB="0" anchor="ctr">
+                  <a:tcPr marL="0" marR="0" marT="0" marB="0" anchor="b">
                     <a:lnL w="0" cap="flat" cmpd="sng" algn="ctr">
                       <a:solidFill>
                         <a:srgbClr val="99ACFF"/>
@@ -9922,7 +10014,7 @@
                         <a:defRPr/>
                       </a:pPr>
                       <a:r>
-                        <a:rPr lang="en-US" sz="2100">
+                        <a:rPr lang="en-US" sz="2100" dirty="0">
                           <a:solidFill>
                             <a:srgbClr val="000000"/>
                           </a:solidFill>
@@ -9933,10 +10025,10 @@
                         </a:rPr>
                         <a:t>5 x 5</a:t>
                       </a:r>
-                      <a:endParaRPr lang="en-US" sz="2000"/>
+                      <a:endParaRPr lang="en-US" sz="2000" dirty="0"/>
                     </a:p>
                   </a:txBody>
-                  <a:tcPr marL="0" marR="0" marT="0" marB="0" anchor="ctr">
+                  <a:tcPr marL="0" marR="0" marT="0" marB="0" anchor="b">
                     <a:lnL w="0" cap="flat" cmpd="sng" algn="ctr">
                       <a:solidFill>
                         <a:srgbClr val="99ACFF"/>
@@ -10001,7 +10093,7 @@
                       <a:endParaRPr lang="en-US" sz="2000"/>
                     </a:p>
                   </a:txBody>
-                  <a:tcPr marL="0" marR="0" marT="0" marB="0" anchor="ctr">
+                  <a:tcPr marL="0" marR="0" marT="0" marB="0" anchor="b">
                     <a:lnL w="0" cap="flat" cmpd="sng" algn="ctr">
                       <a:solidFill>
                         <a:srgbClr val="99ACFF"/>
@@ -10059,7 +10151,7 @@
                         <a:defRPr/>
                       </a:pPr>
                       <a:r>
-                        <a:rPr lang="en-US" sz="2100">
+                        <a:rPr lang="en-US" sz="2100" dirty="0">
                           <a:solidFill>
                             <a:srgbClr val="000000"/>
                           </a:solidFill>
@@ -10070,10 +10162,10 @@
                         </a:rPr>
                         <a:t>5 x 10</a:t>
                       </a:r>
-                      <a:endParaRPr lang="en-US" sz="2000"/>
+                      <a:endParaRPr lang="en-US" sz="2000" dirty="0"/>
                     </a:p>
                   </a:txBody>
-                  <a:tcPr marL="0" marR="0" marT="0" marB="0" anchor="ctr">
+                  <a:tcPr marL="0" marR="0" marT="0" marB="0" anchor="b">
                     <a:lnL w="0" cap="flat" cmpd="sng" algn="ctr">
                       <a:solidFill>
                         <a:srgbClr val="99ACFF"/>
@@ -10127,7 +10219,7 @@
                         <a:defRPr/>
                       </a:pPr>
                       <a:r>
-                        <a:rPr lang="en-US" sz="2100">
+                        <a:rPr lang="en-US" sz="2100" dirty="0">
                           <a:solidFill>
                             <a:srgbClr val="000000"/>
                           </a:solidFill>
@@ -10138,10 +10230,10 @@
                         </a:rPr>
                         <a:t>{{PP5X50}}</a:t>
                       </a:r>
-                      <a:endParaRPr lang="en-US" sz="2000"/>
+                      <a:endParaRPr lang="en-US" sz="2000" dirty="0"/>
                     </a:p>
                   </a:txBody>
-                  <a:tcPr marL="0" marR="0" marT="0" marB="0" anchor="ctr">
+                  <a:tcPr marL="0" marR="0" marT="0" marB="0" anchor="b">
                     <a:lnL w="0" cap="flat" cmpd="sng" algn="ctr">
                       <a:solidFill>
                         <a:srgbClr val="99ACFF"/>
@@ -10216,7 +10308,7 @@
                       <a:endParaRPr lang="en-US" sz="2000"/>
                     </a:p>
                   </a:txBody>
-                  <a:tcPr marL="0" marR="0" marT="0" marB="0" anchor="ctr">
+                  <a:tcPr marL="0" marR="0" marT="0" marB="0" anchor="b">
                     <a:lnL w="0" cap="flat" cmpd="sng" algn="ctr">
                       <a:solidFill>
                         <a:srgbClr val="99ACFF"/>
@@ -10267,7 +10359,7 @@
                         <a:defRPr/>
                       </a:pPr>
                       <a:r>
-                        <a:rPr lang="en-US" sz="2100">
+                        <a:rPr lang="en-US" sz="2100" dirty="0">
                           <a:solidFill>
                             <a:srgbClr val="000000"/>
                           </a:solidFill>
@@ -10278,10 +10370,10 @@
                         </a:rPr>
                         <a:t>{{PP5X100}}</a:t>
                       </a:r>
-                      <a:endParaRPr lang="en-US" sz="2000"/>
+                      <a:endParaRPr lang="en-US" sz="2000" dirty="0"/>
                     </a:p>
                   </a:txBody>
-                  <a:tcPr marL="0" marR="0" marT="0" marB="0" anchor="ctr">
+                  <a:tcPr marL="0" marR="0" marT="0" marB="0" anchor="b">
                     <a:lnL w="0" cap="flat" cmpd="sng" algn="ctr">
                       <a:solidFill>
                         <a:srgbClr val="99ACFF"/>
@@ -10353,7 +10445,7 @@
                       <a:endParaRPr lang="en-US" sz="2000"/>
                     </a:p>
                   </a:txBody>
-                  <a:tcPr marL="0" marR="0" marT="0" marB="0" anchor="ctr">
+                  <a:tcPr marL="0" marR="0" marT="0" marB="0" anchor="b">
                     <a:lnL w="0" cap="flat" cmpd="sng" algn="ctr">
                       <a:solidFill>
                         <a:srgbClr val="99ACFF"/>
@@ -10407,7 +10499,7 @@
                         <a:defRPr/>
                       </a:pPr>
                       <a:r>
-                        <a:rPr lang="en-US" sz="2100">
+                        <a:rPr lang="en-US" sz="2100" dirty="0">
                           <a:solidFill>
                             <a:srgbClr val="000000"/>
                           </a:solidFill>
@@ -10418,10 +10510,10 @@
                         </a:rPr>
                         <a:t>{{PP5X150}}</a:t>
                       </a:r>
-                      <a:endParaRPr lang="en-US" sz="2000"/>
+                      <a:endParaRPr lang="en-US" sz="2000" dirty="0"/>
                     </a:p>
                   </a:txBody>
-                  <a:tcPr marL="0" marR="0" marT="0" marB="0" anchor="ctr">
+                  <a:tcPr marL="0" marR="0" marT="0" marB="0" anchor="b">
                     <a:lnL w="0" cap="flat" cmpd="sng" algn="ctr">
                       <a:solidFill>
                         <a:srgbClr val="99ACFF"/>
@@ -10496,7 +10588,7 @@
                       <a:endParaRPr lang="en-US" sz="2000"/>
                     </a:p>
                   </a:txBody>
-                  <a:tcPr marL="0" marR="0" marT="0" marB="0" anchor="ctr">
+                  <a:tcPr marL="0" marR="0" marT="0" marB="0" anchor="b">
                     <a:lnL w="0" cap="flat" cmpd="sng" algn="ctr">
                       <a:solidFill>
                         <a:srgbClr val="99ACFF"/>
@@ -10547,7 +10639,7 @@
                         <a:defRPr/>
                       </a:pPr>
                       <a:r>
-                        <a:rPr lang="en-US" sz="2100">
+                        <a:rPr lang="en-US" sz="2100" dirty="0">
                           <a:solidFill>
                             <a:srgbClr val="000000"/>
                           </a:solidFill>
@@ -10558,10 +10650,10 @@
                         </a:rPr>
                         <a:t>{{PP5X200}}</a:t>
                       </a:r>
-                      <a:endParaRPr lang="en-US" sz="2000"/>
+                      <a:endParaRPr lang="en-US" sz="2000" dirty="0"/>
                     </a:p>
                   </a:txBody>
-                  <a:tcPr marL="0" marR="0" marT="0" marB="0" anchor="ctr">
+                  <a:tcPr marL="0" marR="0" marT="0" marB="0" anchor="b">
                     <a:lnL w="0" cap="flat" cmpd="sng" algn="ctr">
                       <a:solidFill>
                         <a:srgbClr val="99ACFF"/>
@@ -10633,7 +10725,7 @@
                       <a:endParaRPr lang="en-US" sz="2000"/>
                     </a:p>
                   </a:txBody>
-                  <a:tcPr marL="0" marR="0" marT="0" marB="0" anchor="ctr">
+                  <a:tcPr marL="0" marR="0" marT="0" marB="0" anchor="b">
                     <a:lnL w="19050" cap="flat" cmpd="sng" algn="ctr">
                       <a:solidFill>
                         <a:srgbClr val="3B52A1"/>
@@ -10701,7 +10793,7 @@
                       <a:endParaRPr lang="en-US" sz="2000" dirty="0"/>
                     </a:p>
                   </a:txBody>
-                  <a:tcPr marL="0" marR="0" marT="0" marB="0" anchor="ctr">
+                  <a:tcPr marL="0" marR="0" marT="0" marB="0" anchor="b">
                     <a:lnL w="0" cap="flat" cmpd="sng" algn="ctr">
                       <a:solidFill>
                         <a:srgbClr val="99ACFF"/>
@@ -10762,7 +10854,7 @@
           <p:nvPr>
             <p:extLst>
               <p:ext uri="{D42A27DB-BD31-4B8C-83A1-F6EECF244321}">
-                <p14:modId xmlns:p14="http://schemas.microsoft.com/office/powerpoint/2010/main" val="669665885"/>
+                <p14:modId xmlns:p14="http://schemas.microsoft.com/office/powerpoint/2010/main" val="566071789"/>
               </p:ext>
             </p:extLst>
           </p:nvPr>
@@ -10947,7 +11039,7 @@
                         <a:defRPr/>
                       </a:pPr>
                       <a:r>
-                        <a:rPr lang="en-US" sz="1400">
+                        <a:rPr lang="en-US" sz="1400" dirty="0">
                           <a:solidFill>
                             <a:srgbClr val="000000"/>
                           </a:solidFill>
@@ -10958,10 +11050,10 @@
                         </a:rPr>
                         <a:t>{{PP3ADDRESS}}</a:t>
                       </a:r>
-                      <a:endParaRPr lang="en-US" sz="2000"/>
+                      <a:endParaRPr lang="en-US" sz="2000" dirty="0"/>
                     </a:p>
                   </a:txBody>
-                  <a:tcPr marL="0" marR="0" marT="0" marB="0" anchor="ctr">
+                  <a:tcPr marL="0" marR="0" marT="0" marB="0" anchor="b">
                     <a:lnL w="0" cap="flat" cmpd="sng" algn="ctr">
                       <a:solidFill>
                         <a:srgbClr val="99ACFF"/>
@@ -11090,7 +11182,7 @@
                         <a:defRPr/>
                       </a:pPr>
                       <a:r>
-                        <a:rPr lang="en-US" sz="1200">
+                        <a:rPr lang="en-US" sz="1200" dirty="0">
                           <a:solidFill>
                             <a:srgbClr val="4A4A4A"/>
                           </a:solidFill>
@@ -11099,9 +11191,9 @@
                           <a:cs typeface="Avenir"/>
                           <a:sym typeface="Avenir"/>
                         </a:rPr>
-                        <a:t>X Miles Away</a:t>
-                      </a:r>
-                      <a:endParaRPr lang="en-US" sz="2000"/>
+                        <a:t>{{PP3DIST}} Miles Away</a:t>
+                      </a:r>
+                      <a:endParaRPr lang="en-US" sz="2000" dirty="0"/>
                     </a:p>
                   </a:txBody>
                   <a:tcPr marL="0" marR="0" marT="0" marB="0" anchor="ctr">
@@ -11376,7 +11468,7 @@
                         <a:defRPr/>
                       </a:pPr>
                       <a:r>
-                        <a:rPr lang="en-US" sz="2100" b="1">
+                        <a:rPr lang="en-US" sz="2100" b="1" dirty="0">
                           <a:solidFill>
                             <a:srgbClr val="FFFFFF"/>
                           </a:solidFill>
@@ -11387,10 +11479,10 @@
                         </a:rPr>
                         <a:t>Unit Size</a:t>
                       </a:r>
-                      <a:endParaRPr lang="en-US" sz="2000"/>
+                      <a:endParaRPr lang="en-US" sz="2000" dirty="0"/>
                     </a:p>
                   </a:txBody>
-                  <a:tcPr marL="0" marR="0" marT="0" marB="0" anchor="ctr">
+                  <a:tcPr marL="0" marR="0" marT="0" marB="0" anchor="b">
                     <a:lnL w="0" cap="flat" cmpd="sng" algn="ctr">
                       <a:solidFill>
                         <a:srgbClr val="99ACFF"/>
@@ -11458,7 +11550,7 @@
                       <a:endParaRPr lang="en-US" sz="2000"/>
                     </a:p>
                   </a:txBody>
-                  <a:tcPr marL="0" marR="0" marT="0" marB="0" anchor="ctr">
+                  <a:tcPr marL="0" marR="0" marT="0" marB="0" anchor="b">
                     <a:lnL w="0" cap="flat" cmpd="sng" algn="ctr">
                       <a:solidFill>
                         <a:srgbClr val="99ACFF"/>
@@ -11519,7 +11611,7 @@
                         <a:defRPr/>
                       </a:pPr>
                       <a:r>
-                        <a:rPr lang="en-US" sz="2100">
+                        <a:rPr lang="en-US" sz="2100" dirty="0">
                           <a:solidFill>
                             <a:srgbClr val="000000"/>
                           </a:solidFill>
@@ -11530,10 +11622,10 @@
                         </a:rPr>
                         <a:t>5 x 5</a:t>
                       </a:r>
-                      <a:endParaRPr lang="en-US" sz="2000"/>
+                      <a:endParaRPr lang="en-US" sz="2000" dirty="0"/>
                     </a:p>
                   </a:txBody>
-                  <a:tcPr marL="0" marR="0" marT="0" marB="0" anchor="ctr">
+                  <a:tcPr marL="0" marR="0" marT="0" marB="0" anchor="b">
                     <a:lnL w="0" cap="flat" cmpd="sng" algn="ctr">
                       <a:solidFill>
                         <a:srgbClr val="99ACFF"/>
@@ -11598,7 +11690,7 @@
                       <a:endParaRPr lang="en-US" sz="2000"/>
                     </a:p>
                   </a:txBody>
-                  <a:tcPr marL="0" marR="0" marT="0" marB="0" anchor="ctr">
+                  <a:tcPr marL="0" marR="0" marT="0" marB="0" anchor="b">
                     <a:lnL w="0" cap="flat" cmpd="sng" algn="ctr">
                       <a:solidFill>
                         <a:srgbClr val="99ACFF"/>
@@ -11656,7 +11748,7 @@
                         <a:defRPr/>
                       </a:pPr>
                       <a:r>
-                        <a:rPr lang="en-US" sz="2100">
+                        <a:rPr lang="en-US" sz="2100" dirty="0">
                           <a:solidFill>
                             <a:srgbClr val="000000"/>
                           </a:solidFill>
@@ -11667,10 +11759,10 @@
                         </a:rPr>
                         <a:t>5 x 10</a:t>
                       </a:r>
-                      <a:endParaRPr lang="en-US" sz="2000"/>
+                      <a:endParaRPr lang="en-US" sz="2000" dirty="0"/>
                     </a:p>
                   </a:txBody>
-                  <a:tcPr marL="0" marR="0" marT="0" marB="0" anchor="ctr">
+                  <a:tcPr marL="0" marR="0" marT="0" marB="0" anchor="b">
                     <a:lnL w="0" cap="flat" cmpd="sng" algn="ctr">
                       <a:solidFill>
                         <a:srgbClr val="99ACFF"/>
@@ -11738,7 +11830,7 @@
                       <a:endParaRPr lang="en-US" sz="2000"/>
                     </a:p>
                   </a:txBody>
-                  <a:tcPr marL="0" marR="0" marT="0" marB="0" anchor="ctr">
+                  <a:tcPr marL="0" marR="0" marT="0" marB="0" anchor="b">
                     <a:lnL w="0" cap="flat" cmpd="sng" algn="ctr">
                       <a:solidFill>
                         <a:srgbClr val="99ACFF"/>
@@ -11799,7 +11891,7 @@
                         <a:defRPr/>
                       </a:pPr>
                       <a:r>
-                        <a:rPr lang="en-US" sz="2100">
+                        <a:rPr lang="en-US" sz="2100" dirty="0">
                           <a:solidFill>
                             <a:srgbClr val="000000"/>
                           </a:solidFill>
@@ -11810,10 +11902,10 @@
                         </a:rPr>
                         <a:t>10 x 10</a:t>
                       </a:r>
-                      <a:endParaRPr lang="en-US" sz="2000"/>
+                      <a:endParaRPr lang="en-US" sz="2000" dirty="0"/>
                     </a:p>
                   </a:txBody>
-                  <a:tcPr marL="0" marR="0" marT="0" marB="0" anchor="ctr">
+                  <a:tcPr marL="0" marR="0" marT="0" marB="0" anchor="b">
                     <a:lnL w="0" cap="flat" cmpd="sng" algn="ctr">
                       <a:solidFill>
                         <a:srgbClr val="99ACFF"/>
@@ -11878,7 +11970,7 @@
                       <a:endParaRPr lang="en-US" sz="2000"/>
                     </a:p>
                   </a:txBody>
-                  <a:tcPr marL="0" marR="0" marT="0" marB="0" anchor="ctr">
+                  <a:tcPr marL="0" marR="0" marT="0" marB="0" anchor="b">
                     <a:lnL w="0" cap="flat" cmpd="sng" algn="ctr">
                       <a:solidFill>
                         <a:srgbClr val="99ACFF"/>
@@ -11936,7 +12028,7 @@
                         <a:defRPr/>
                       </a:pPr>
                       <a:r>
-                        <a:rPr lang="en-US" sz="2100">
+                        <a:rPr lang="en-US" sz="2100" dirty="0">
                           <a:solidFill>
                             <a:srgbClr val="000000"/>
                           </a:solidFill>
@@ -11947,10 +12039,10 @@
                         </a:rPr>
                         <a:t>10 x 15</a:t>
                       </a:r>
-                      <a:endParaRPr lang="en-US" sz="2000"/>
+                      <a:endParaRPr lang="en-US" sz="2000" dirty="0"/>
                     </a:p>
                   </a:txBody>
-                  <a:tcPr marL="0" marR="0" marT="0" marB="0" anchor="ctr">
+                  <a:tcPr marL="0" marR="0" marT="0" marB="0" anchor="b">
                     <a:lnL w="0" cap="flat" cmpd="sng" algn="ctr">
                       <a:solidFill>
                         <a:srgbClr val="99ACFF"/>
@@ -12018,7 +12110,7 @@
                       <a:endParaRPr lang="en-US" sz="2000"/>
                     </a:p>
                   </a:txBody>
-                  <a:tcPr marL="0" marR="0" marT="0" marB="0" anchor="ctr">
+                  <a:tcPr marL="0" marR="0" marT="0" marB="0" anchor="b">
                     <a:lnL w="0" cap="flat" cmpd="sng" algn="ctr">
                       <a:solidFill>
                         <a:srgbClr val="99ACFF"/>
@@ -12093,7 +12185,7 @@
                       <a:endParaRPr lang="en-US" sz="2000" dirty="0"/>
                     </a:p>
                   </a:txBody>
-                  <a:tcPr marL="0" marR="0" marT="0" marB="0" anchor="ctr">
+                  <a:tcPr marL="0" marR="0" marT="0" marB="0" anchor="b">
                     <a:lnL w="0" cap="flat" cmpd="sng" algn="ctr">
                       <a:solidFill>
                         <a:srgbClr val="99ACFF"/>
@@ -12158,7 +12250,7 @@
                       <a:endParaRPr lang="en-US" sz="2000"/>
                     </a:p>
                   </a:txBody>
-                  <a:tcPr marL="0" marR="0" marT="0" marB="0" anchor="ctr">
+                  <a:tcPr marL="0" marR="0" marT="0" marB="0" anchor="b">
                     <a:lnL w="0" cap="flat" cmpd="sng" algn="ctr">
                       <a:solidFill>
                         <a:srgbClr val="99ACFF"/>
@@ -12230,7 +12322,7 @@
                       <a:endParaRPr lang="en-US" sz="2000" dirty="0"/>
                     </a:p>
                   </a:txBody>
-                  <a:tcPr marL="0" marR="0" marT="0" marB="0" anchor="ctr">
+                  <a:tcPr marL="0" marR="0" marT="0" marB="0" anchor="b">
                     <a:lnL w="19050" cap="flat" cmpd="sng" algn="ctr">
                       <a:solidFill>
                         <a:srgbClr val="3B52A1"/>
@@ -12298,7 +12390,7 @@
                       <a:endParaRPr lang="en-US" sz="2000" dirty="0"/>
                     </a:p>
                   </a:txBody>
-                  <a:tcPr marL="0" marR="0" marT="0" marB="0" anchor="ctr">
+                  <a:tcPr marL="0" marR="0" marT="0" marB="0" anchor="b">
                     <a:lnL w="0" cap="flat" cmpd="sng" algn="ctr">
                       <a:solidFill>
                         <a:srgbClr val="99ACFF"/>
@@ -12359,7 +12451,7 @@
           <p:nvPr>
             <p:extLst>
               <p:ext uri="{D42A27DB-BD31-4B8C-83A1-F6EECF244321}">
-                <p14:modId xmlns:p14="http://schemas.microsoft.com/office/powerpoint/2010/main" val="3991350950"/>
+                <p14:modId xmlns:p14="http://schemas.microsoft.com/office/powerpoint/2010/main" val="3781840950"/>
               </p:ext>
             </p:extLst>
           </p:nvPr>
@@ -12544,7 +12636,7 @@
                         <a:defRPr/>
                       </a:pPr>
                       <a:r>
-                        <a:rPr lang="en-US" sz="1400">
+                        <a:rPr lang="en-US" sz="1400" dirty="0">
                           <a:solidFill>
                             <a:srgbClr val="000000"/>
                           </a:solidFill>
@@ -12555,10 +12647,10 @@
                         </a:rPr>
                         <a:t>{{PP6ADDRESS}}</a:t>
                       </a:r>
-                      <a:endParaRPr lang="en-US" sz="2000"/>
+                      <a:endParaRPr lang="en-US" sz="2000" dirty="0"/>
                     </a:p>
                   </a:txBody>
-                  <a:tcPr marL="0" marR="0" marT="0" marB="0" anchor="ctr">
+                  <a:tcPr marL="0" marR="0" marT="0" marB="0" anchor="b">
                     <a:lnL w="0" cap="flat" cmpd="sng" algn="ctr">
                       <a:solidFill>
                         <a:srgbClr val="99ACFF"/>
@@ -12696,9 +12788,21 @@
                           <a:cs typeface="Avenir"/>
                           <a:sym typeface="Avenir"/>
                         </a:rPr>
-                        <a:t>X Miles Away</a:t>
-                      </a:r>
-                      <a:endParaRPr lang="en-US" sz="2000"/>
+                        <a:t>{{PP6DIST}} Miles </a:t>
+                      </a:r>
+                      <a:r>
+                        <a:rPr lang="en-US" sz="1200" dirty="0">
+                          <a:solidFill>
+                            <a:srgbClr val="4A4A4A"/>
+                          </a:solidFill>
+                          <a:latin typeface="Avenir"/>
+                          <a:ea typeface="Avenir"/>
+                          <a:cs typeface="Avenir"/>
+                          <a:sym typeface="Avenir"/>
+                        </a:rPr>
+                        <a:t>Away</a:t>
+                      </a:r>
+                      <a:endParaRPr lang="en-US" sz="2000" dirty="0"/>
                     </a:p>
                   </a:txBody>
                   <a:tcPr marL="0" marR="0" marT="0" marB="0" anchor="ctr">
@@ -12973,7 +13077,7 @@
                         <a:defRPr/>
                       </a:pPr>
                       <a:r>
-                        <a:rPr lang="en-US" sz="2100" b="1">
+                        <a:rPr lang="en-US" sz="2100" b="1" dirty="0">
                           <a:solidFill>
                             <a:srgbClr val="FFFFFF"/>
                           </a:solidFill>
@@ -12984,10 +13088,10 @@
                         </a:rPr>
                         <a:t>Unit Size</a:t>
                       </a:r>
-                      <a:endParaRPr lang="en-US" sz="2000"/>
+                      <a:endParaRPr lang="en-US" sz="2000" dirty="0"/>
                     </a:p>
                   </a:txBody>
-                  <a:tcPr marL="0" marR="0" marT="0" marB="0" anchor="ctr">
+                  <a:tcPr marL="0" marR="0" marT="0" marB="0" anchor="b">
                     <a:lnL w="0" cap="flat" cmpd="sng" algn="ctr">
                       <a:solidFill>
                         <a:srgbClr val="99ACFF"/>
@@ -13055,7 +13159,7 @@
                       <a:endParaRPr lang="en-US" sz="2000"/>
                     </a:p>
                   </a:txBody>
-                  <a:tcPr marL="0" marR="0" marT="0" marB="0" anchor="ctr">
+                  <a:tcPr marL="0" marR="0" marT="0" marB="0" anchor="b">
                     <a:lnL w="0" cap="flat" cmpd="sng" algn="ctr">
                       <a:solidFill>
                         <a:srgbClr val="99ACFF"/>
@@ -13116,7 +13220,7 @@
                         <a:defRPr/>
                       </a:pPr>
                       <a:r>
-                        <a:rPr lang="en-US" sz="2100">
+                        <a:rPr lang="en-US" sz="2100" dirty="0">
                           <a:solidFill>
                             <a:srgbClr val="000000"/>
                           </a:solidFill>
@@ -13127,10 +13231,10 @@
                         </a:rPr>
                         <a:t>5 x 5</a:t>
                       </a:r>
-                      <a:endParaRPr lang="en-US" sz="2000"/>
+                      <a:endParaRPr lang="en-US" sz="2000" dirty="0"/>
                     </a:p>
                   </a:txBody>
-                  <a:tcPr marL="0" marR="0" marT="0" marB="0" anchor="ctr">
+                  <a:tcPr marL="0" marR="0" marT="0" marB="0" anchor="b">
                     <a:lnL w="0" cap="flat" cmpd="sng" algn="ctr">
                       <a:solidFill>
                         <a:srgbClr val="99ACFF"/>
@@ -13195,7 +13299,7 @@
                       <a:endParaRPr lang="en-US" sz="2000"/>
                     </a:p>
                   </a:txBody>
-                  <a:tcPr marL="0" marR="0" marT="0" marB="0" anchor="ctr">
+                  <a:tcPr marL="0" marR="0" marT="0" marB="0" anchor="b">
                     <a:lnL w="0" cap="flat" cmpd="sng" algn="ctr">
                       <a:solidFill>
                         <a:srgbClr val="99ACFF"/>
@@ -13253,7 +13357,7 @@
                         <a:defRPr/>
                       </a:pPr>
                       <a:r>
-                        <a:rPr lang="en-US" sz="2100">
+                        <a:rPr lang="en-US" sz="2100" dirty="0">
                           <a:solidFill>
                             <a:srgbClr val="000000"/>
                           </a:solidFill>
@@ -13264,10 +13368,10 @@
                         </a:rPr>
                         <a:t>5 x 10</a:t>
                       </a:r>
-                      <a:endParaRPr lang="en-US" sz="2000"/>
+                      <a:endParaRPr lang="en-US" sz="2000" dirty="0"/>
                     </a:p>
                   </a:txBody>
-                  <a:tcPr marL="0" marR="0" marT="0" marB="0" anchor="ctr">
+                  <a:tcPr marL="0" marR="0" marT="0" marB="0" anchor="b">
                     <a:lnL w="0" cap="flat" cmpd="sng" algn="ctr">
                       <a:solidFill>
                         <a:srgbClr val="99ACFF"/>
@@ -13335,7 +13439,7 @@
                       <a:endParaRPr lang="en-US" sz="2000"/>
                     </a:p>
                   </a:txBody>
-                  <a:tcPr marL="0" marR="0" marT="0" marB="0" anchor="ctr">
+                  <a:tcPr marL="0" marR="0" marT="0" marB="0" anchor="b">
                     <a:lnL w="0" cap="flat" cmpd="sng" algn="ctr">
                       <a:solidFill>
                         <a:srgbClr val="99ACFF"/>
@@ -13396,7 +13500,7 @@
                         <a:defRPr/>
                       </a:pPr>
                       <a:r>
-                        <a:rPr lang="en-US" sz="2100">
+                        <a:rPr lang="en-US" sz="2100" dirty="0">
                           <a:solidFill>
                             <a:srgbClr val="000000"/>
                           </a:solidFill>
@@ -13407,10 +13511,10 @@
                         </a:rPr>
                         <a:t>10 x 10</a:t>
                       </a:r>
-                      <a:endParaRPr lang="en-US" sz="2000"/>
+                      <a:endParaRPr lang="en-US" sz="2000" dirty="0"/>
                     </a:p>
                   </a:txBody>
-                  <a:tcPr marL="0" marR="0" marT="0" marB="0" anchor="ctr">
+                  <a:tcPr marL="0" marR="0" marT="0" marB="0" anchor="b">
                     <a:lnL w="0" cap="flat" cmpd="sng" algn="ctr">
                       <a:solidFill>
                         <a:srgbClr val="99ACFF"/>
@@ -13475,7 +13579,7 @@
                       <a:endParaRPr lang="en-US" sz="2000"/>
                     </a:p>
                   </a:txBody>
-                  <a:tcPr marL="0" marR="0" marT="0" marB="0" anchor="ctr">
+                  <a:tcPr marL="0" marR="0" marT="0" marB="0" anchor="b">
                     <a:lnL w="0" cap="flat" cmpd="sng" algn="ctr">
                       <a:solidFill>
                         <a:srgbClr val="99ACFF"/>
@@ -13533,7 +13637,7 @@
                         <a:defRPr/>
                       </a:pPr>
                       <a:r>
-                        <a:rPr lang="en-US" sz="2100">
+                        <a:rPr lang="en-US" sz="2100" dirty="0">
                           <a:solidFill>
                             <a:srgbClr val="000000"/>
                           </a:solidFill>
@@ -13544,10 +13648,10 @@
                         </a:rPr>
                         <a:t>10 x 15</a:t>
                       </a:r>
-                      <a:endParaRPr lang="en-US" sz="2000"/>
+                      <a:endParaRPr lang="en-US" sz="2000" dirty="0"/>
                     </a:p>
                   </a:txBody>
-                  <a:tcPr marL="0" marR="0" marT="0" marB="0" anchor="ctr">
+                  <a:tcPr marL="0" marR="0" marT="0" marB="0" anchor="b">
                     <a:lnL w="0" cap="flat" cmpd="sng" algn="ctr">
                       <a:solidFill>
                         <a:srgbClr val="99ACFF"/>
@@ -13615,7 +13719,7 @@
                       <a:endParaRPr lang="en-US" sz="2000"/>
                     </a:p>
                   </a:txBody>
-                  <a:tcPr marL="0" marR="0" marT="0" marB="0" anchor="ctr">
+                  <a:tcPr marL="0" marR="0" marT="0" marB="0" anchor="b">
                     <a:lnL w="0" cap="flat" cmpd="sng" algn="ctr">
                       <a:solidFill>
                         <a:srgbClr val="99ACFF"/>
@@ -13676,7 +13780,7 @@
                         <a:defRPr/>
                       </a:pPr>
                       <a:r>
-                        <a:rPr lang="en-US" sz="2100">
+                        <a:rPr lang="en-US" sz="2100" dirty="0">
                           <a:solidFill>
                             <a:srgbClr val="000000"/>
                           </a:solidFill>
@@ -13687,10 +13791,10 @@
                         </a:rPr>
                         <a:t>10 x 20</a:t>
                       </a:r>
-                      <a:endParaRPr lang="en-US" sz="2000"/>
+                      <a:endParaRPr lang="en-US" sz="2000" dirty="0"/>
                     </a:p>
                   </a:txBody>
-                  <a:tcPr marL="0" marR="0" marT="0" marB="0" anchor="ctr">
+                  <a:tcPr marL="0" marR="0" marT="0" marB="0" anchor="b">
                     <a:lnL w="0" cap="flat" cmpd="sng" algn="ctr">
                       <a:solidFill>
                         <a:srgbClr val="99ACFF"/>
@@ -13755,7 +13859,7 @@
                       <a:endParaRPr lang="en-US" sz="2000"/>
                     </a:p>
                   </a:txBody>
-                  <a:tcPr marL="0" marR="0" marT="0" marB="0" anchor="ctr">
+                  <a:tcPr marL="0" marR="0" marT="0" marB="0" anchor="b">
                     <a:lnL w="0" cap="flat" cmpd="sng" algn="ctr">
                       <a:solidFill>
                         <a:srgbClr val="99ACFF"/>
@@ -13813,7 +13917,7 @@
                         <a:defRPr/>
                       </a:pPr>
                       <a:r>
-                        <a:rPr lang="en-US" sz="2100" b="1">
+                        <a:rPr lang="en-US" sz="2100" b="1" dirty="0">
                           <a:solidFill>
                             <a:srgbClr val="000000"/>
                           </a:solidFill>
@@ -13824,10 +13928,10 @@
                         </a:rPr>
                         <a:t>AVG</a:t>
                       </a:r>
-                      <a:endParaRPr lang="en-US" sz="2000"/>
+                      <a:endParaRPr lang="en-US" sz="2000" dirty="0"/>
                     </a:p>
                   </a:txBody>
-                  <a:tcPr marL="0" marR="0" marT="0" marB="0" anchor="ctr">
+                  <a:tcPr marL="0" marR="0" marT="0" marB="0" anchor="b">
                     <a:lnL w="19050" cap="flat" cmpd="sng" algn="ctr">
                       <a:solidFill>
                         <a:srgbClr val="3B52A1"/>
@@ -13895,7 +13999,7 @@
                       <a:endParaRPr lang="en-US" sz="2000" dirty="0"/>
                     </a:p>
                   </a:txBody>
-                  <a:tcPr marL="0" marR="0" marT="0" marB="0" anchor="ctr">
+                  <a:tcPr marL="0" marR="0" marT="0" marB="0" anchor="b">
                     <a:lnL w="0" cap="flat" cmpd="sng" algn="ctr">
                       <a:solidFill>
                         <a:srgbClr val="99ACFF"/>

--- a/storeinsight/public/COMPSETTEMPLATE.pptx
+++ b/storeinsight/public/COMPSETTEMPLATE.pptx
@@ -7,7 +7,7 @@
   <p:sldIdLst>
     <p:sldId id="256" r:id="rId2"/>
   </p:sldIdLst>
-  <p:sldSz cx="17881600" cy="10058400"/>
+  <p:sldSz cx="17881600" cy="11887200"/>
   <p:notesSz cx="6858000" cy="9144000"/>
   <p:embeddedFontLst>
     <p:embeddedFont>
@@ -117,7 +117,7 @@
   <p:extLst>
     <p:ext uri="{EFAFB233-063F-42B5-8137-9DF3F51BA10A}">
       <p15:sldGuideLst xmlns:p15="http://schemas.microsoft.com/office/powerpoint/2012/main">
-        <p15:guide id="1" orient="horz" pos="2160" userDrawn="1">
+        <p15:guide id="1" orient="horz" pos="2553" userDrawn="1">
           <p15:clr>
             <a:srgbClr val="A4A3A4"/>
           </p15:clr>
@@ -162,8 +162,8 @@
         </p:nvSpPr>
         <p:spPr>
           <a:xfrm>
-            <a:off x="1219200" y="2130425"/>
-            <a:ext cx="13817600" cy="1470025"/>
+            <a:off x="1219200" y="2517776"/>
+            <a:ext cx="13817600" cy="1737302"/>
           </a:xfrm>
         </p:spPr>
         <p:txBody>
@@ -189,8 +189,8 @@
         </p:nvSpPr>
         <p:spPr>
           <a:xfrm>
-            <a:off x="2438400" y="3886200"/>
-            <a:ext cx="11379200" cy="1752600"/>
+            <a:off x="2438400" y="4592782"/>
+            <a:ext cx="11379200" cy="2071255"/>
           </a:xfrm>
         </p:spPr>
         <p:txBody>
@@ -313,7 +313,7 @@
             <a:fld id="{1D8BD707-D9CF-40AE-B4C6-C98DA3205C09}" type="datetimeFigureOut">
               <a:rPr lang="en-US" smtClean="0"/>
               <a:pPr/>
-              <a:t>2/17/2026</a:t>
+              <a:t>2/24/2026</a:t>
             </a:fld>
             <a:endParaRPr lang="en-US"/>
           </a:p>
@@ -478,7 +478,7 @@
             <a:fld id="{1D8BD707-D9CF-40AE-B4C6-C98DA3205C09}" type="datetimeFigureOut">
               <a:rPr lang="en-US" smtClean="0"/>
               <a:pPr/>
-              <a:t>2/17/2026</a:t>
+              <a:t>2/24/2026</a:t>
             </a:fld>
             <a:endParaRPr lang="en-US"/>
           </a:p>
@@ -564,8 +564,8 @@
         </p:nvSpPr>
         <p:spPr>
           <a:xfrm>
-            <a:off x="11785600" y="274639"/>
-            <a:ext cx="3657600" cy="5851525"/>
+            <a:off x="11785600" y="324574"/>
+            <a:ext cx="3657600" cy="6915439"/>
           </a:xfrm>
         </p:spPr>
         <p:txBody>
@@ -591,8 +591,8 @@
         </p:nvSpPr>
         <p:spPr>
           <a:xfrm>
-            <a:off x="812800" y="274639"/>
-            <a:ext cx="10701867" cy="5851525"/>
+            <a:off x="812801" y="324574"/>
+            <a:ext cx="10701867" cy="6915439"/>
           </a:xfrm>
         </p:spPr>
         <p:txBody>
@@ -653,7 +653,7 @@
             <a:fld id="{1D8BD707-D9CF-40AE-B4C6-C98DA3205C09}" type="datetimeFigureOut">
               <a:rPr lang="en-US" smtClean="0"/>
               <a:pPr/>
-              <a:t>2/17/2026</a:t>
+              <a:t>2/24/2026</a:t>
             </a:fld>
             <a:endParaRPr lang="en-US"/>
           </a:p>
@@ -818,7 +818,7 @@
             <a:fld id="{1D8BD707-D9CF-40AE-B4C6-C98DA3205C09}" type="datetimeFigureOut">
               <a:rPr lang="en-US" smtClean="0"/>
               <a:pPr/>
-              <a:t>2/17/2026</a:t>
+              <a:t>2/24/2026</a:t>
             </a:fld>
             <a:endParaRPr lang="en-US"/>
           </a:p>
@@ -904,8 +904,8 @@
         </p:nvSpPr>
         <p:spPr>
           <a:xfrm>
-            <a:off x="1284112" y="4406901"/>
-            <a:ext cx="13817600" cy="1362075"/>
+            <a:off x="1284112" y="5208156"/>
+            <a:ext cx="13817600" cy="1609725"/>
           </a:xfrm>
         </p:spPr>
         <p:txBody>
@@ -935,8 +935,8 @@
         </p:nvSpPr>
         <p:spPr>
           <a:xfrm>
-            <a:off x="1284112" y="2906714"/>
-            <a:ext cx="13817600" cy="1500187"/>
+            <a:off x="1284112" y="3435208"/>
+            <a:ext cx="13817600" cy="1772948"/>
           </a:xfrm>
         </p:spPr>
         <p:txBody>
@@ -1060,7 +1060,7 @@
             <a:fld id="{1D8BD707-D9CF-40AE-B4C6-C98DA3205C09}" type="datetimeFigureOut">
               <a:rPr lang="en-US" smtClean="0"/>
               <a:pPr/>
-              <a:t>2/17/2026</a:t>
+              <a:t>2/24/2026</a:t>
             </a:fld>
             <a:endParaRPr lang="en-US"/>
           </a:p>
@@ -1168,8 +1168,8 @@
         </p:nvSpPr>
         <p:spPr>
           <a:xfrm>
-            <a:off x="812800" y="1600201"/>
-            <a:ext cx="7179733" cy="4525963"/>
+            <a:off x="812801" y="1891147"/>
+            <a:ext cx="7179733" cy="5348865"/>
           </a:xfrm>
         </p:spPr>
         <p:txBody>
@@ -1252,8 +1252,8 @@
         </p:nvSpPr>
         <p:spPr>
           <a:xfrm>
-            <a:off x="8263467" y="1600201"/>
-            <a:ext cx="7179733" cy="4525963"/>
+            <a:off x="8263468" y="1891147"/>
+            <a:ext cx="7179733" cy="5348865"/>
           </a:xfrm>
         </p:spPr>
         <p:txBody>
@@ -1342,7 +1342,7 @@
             <a:fld id="{1D8BD707-D9CF-40AE-B4C6-C98DA3205C09}" type="datetimeFigureOut">
               <a:rPr lang="en-US" smtClean="0"/>
               <a:pPr/>
-              <a:t>2/17/2026</a:t>
+              <a:t>2/24/2026</a:t>
             </a:fld>
             <a:endParaRPr lang="en-US"/>
           </a:p>
@@ -1454,8 +1454,8 @@
         </p:nvSpPr>
         <p:spPr>
           <a:xfrm>
-            <a:off x="812800" y="1535113"/>
-            <a:ext cx="7182556" cy="639762"/>
+            <a:off x="812800" y="1814225"/>
+            <a:ext cx="7182556" cy="756082"/>
           </a:xfrm>
         </p:spPr>
         <p:txBody>
@@ -1519,8 +1519,8 @@
         </p:nvSpPr>
         <p:spPr>
           <a:xfrm>
-            <a:off x="812800" y="2174875"/>
-            <a:ext cx="7182556" cy="3951288"/>
+            <a:off x="812800" y="2570307"/>
+            <a:ext cx="7182556" cy="4669704"/>
           </a:xfrm>
         </p:spPr>
         <p:txBody>
@@ -1603,8 +1603,8 @@
         </p:nvSpPr>
         <p:spPr>
           <a:xfrm>
-            <a:off x="8257823" y="1535113"/>
-            <a:ext cx="7185378" cy="639762"/>
+            <a:off x="8257823" y="1814225"/>
+            <a:ext cx="7185378" cy="756082"/>
           </a:xfrm>
         </p:spPr>
         <p:txBody>
@@ -1668,8 +1668,8 @@
         </p:nvSpPr>
         <p:spPr>
           <a:xfrm>
-            <a:off x="8257823" y="2174875"/>
-            <a:ext cx="7185378" cy="3951288"/>
+            <a:off x="8257823" y="2570307"/>
+            <a:ext cx="7185378" cy="4669704"/>
           </a:xfrm>
         </p:spPr>
         <p:txBody>
@@ -1758,7 +1758,7 @@
             <a:fld id="{1D8BD707-D9CF-40AE-B4C6-C98DA3205C09}" type="datetimeFigureOut">
               <a:rPr lang="en-US" smtClean="0"/>
               <a:pPr/>
-              <a:t>2/17/2026</a:t>
+              <a:t>2/24/2026</a:t>
             </a:fld>
             <a:endParaRPr lang="en-US"/>
           </a:p>
@@ -1872,7 +1872,7 @@
             <a:fld id="{1D8BD707-D9CF-40AE-B4C6-C98DA3205C09}" type="datetimeFigureOut">
               <a:rPr lang="en-US" smtClean="0"/>
               <a:pPr/>
-              <a:t>2/17/2026</a:t>
+              <a:t>2/24/2026</a:t>
             </a:fld>
             <a:endParaRPr lang="en-US"/>
           </a:p>
@@ -1964,7 +1964,7 @@
             <a:fld id="{1D8BD707-D9CF-40AE-B4C6-C98DA3205C09}" type="datetimeFigureOut">
               <a:rPr lang="en-US" smtClean="0"/>
               <a:pPr/>
-              <a:t>2/17/2026</a:t>
+              <a:t>2/24/2026</a:t>
             </a:fld>
             <a:endParaRPr lang="en-US"/>
           </a:p>
@@ -2050,8 +2050,8 @@
         </p:nvSpPr>
         <p:spPr>
           <a:xfrm>
-            <a:off x="812801" y="273050"/>
-            <a:ext cx="5348112" cy="1162050"/>
+            <a:off x="812801" y="322695"/>
+            <a:ext cx="5348112" cy="1373332"/>
           </a:xfrm>
         </p:spPr>
         <p:txBody>
@@ -2081,8 +2081,8 @@
         </p:nvSpPr>
         <p:spPr>
           <a:xfrm>
-            <a:off x="6355644" y="273051"/>
-            <a:ext cx="9087556" cy="5853113"/>
+            <a:off x="6355644" y="322697"/>
+            <a:ext cx="9087556" cy="6917315"/>
           </a:xfrm>
         </p:spPr>
         <p:txBody>
@@ -2165,8 +2165,8 @@
         </p:nvSpPr>
         <p:spPr>
           <a:xfrm>
-            <a:off x="812801" y="1435101"/>
-            <a:ext cx="5348112" cy="4691063"/>
+            <a:off x="812801" y="1696029"/>
+            <a:ext cx="5348112" cy="5543984"/>
           </a:xfrm>
         </p:spPr>
         <p:txBody>
@@ -2236,7 +2236,7 @@
             <a:fld id="{1D8BD707-D9CF-40AE-B4C6-C98DA3205C09}" type="datetimeFigureOut">
               <a:rPr lang="en-US" smtClean="0"/>
               <a:pPr/>
-              <a:t>2/17/2026</a:t>
+              <a:t>2/24/2026</a:t>
             </a:fld>
             <a:endParaRPr lang="en-US"/>
           </a:p>
@@ -2322,8 +2322,8 @@
         </p:nvSpPr>
         <p:spPr>
           <a:xfrm>
-            <a:off x="3186290" y="4800600"/>
-            <a:ext cx="9753600" cy="566738"/>
+            <a:off x="3186290" y="5673437"/>
+            <a:ext cx="9753600" cy="669781"/>
           </a:xfrm>
         </p:spPr>
         <p:txBody>
@@ -2353,8 +2353,8 @@
         </p:nvSpPr>
         <p:spPr>
           <a:xfrm>
-            <a:off x="3186290" y="612775"/>
-            <a:ext cx="9753600" cy="4114800"/>
+            <a:off x="3186290" y="724189"/>
+            <a:ext cx="9753600" cy="4862945"/>
           </a:xfrm>
         </p:spPr>
         <p:txBody>
@@ -2414,8 +2414,8 @@
         </p:nvSpPr>
         <p:spPr>
           <a:xfrm>
-            <a:off x="3186290" y="5367338"/>
-            <a:ext cx="9753600" cy="804862"/>
+            <a:off x="3186290" y="6343217"/>
+            <a:ext cx="9753600" cy="951201"/>
           </a:xfrm>
         </p:spPr>
         <p:txBody>
@@ -2485,7 +2485,7 @@
             <a:fld id="{1D8BD707-D9CF-40AE-B4C6-C98DA3205C09}" type="datetimeFigureOut">
               <a:rPr lang="en-US" smtClean="0"/>
               <a:pPr/>
-              <a:t>2/17/2026</a:t>
+              <a:t>2/24/2026</a:t>
             </a:fld>
             <a:endParaRPr lang="en-US"/>
           </a:p>
@@ -2576,8 +2576,8 @@
         </p:nvSpPr>
         <p:spPr>
           <a:xfrm>
-            <a:off x="812800" y="274638"/>
-            <a:ext cx="14630400" cy="1143000"/>
+            <a:off x="812800" y="324572"/>
+            <a:ext cx="14630400" cy="1350818"/>
           </a:xfrm>
           <a:prstGeom prst="rect">
             <a:avLst/>
@@ -2608,8 +2608,8 @@
         </p:nvSpPr>
         <p:spPr>
           <a:xfrm>
-            <a:off x="812800" y="1600201"/>
-            <a:ext cx="14630400" cy="4525963"/>
+            <a:off x="812800" y="1891147"/>
+            <a:ext cx="14630400" cy="5348865"/>
           </a:xfrm>
           <a:prstGeom prst="rect">
             <a:avLst/>
@@ -2669,8 +2669,8 @@
         </p:nvSpPr>
         <p:spPr>
           <a:xfrm>
-            <a:off x="812800" y="6356351"/>
-            <a:ext cx="3793067" cy="365125"/>
+            <a:off x="812801" y="7512052"/>
+            <a:ext cx="3793067" cy="431511"/>
           </a:xfrm>
           <a:prstGeom prst="rect">
             <a:avLst/>
@@ -2693,7 +2693,7 @@
             <a:fld id="{1D8BD707-D9CF-40AE-B4C6-C98DA3205C09}" type="datetimeFigureOut">
               <a:rPr lang="en-US" smtClean="0"/>
               <a:pPr/>
-              <a:t>2/17/2026</a:t>
+              <a:t>2/24/2026</a:t>
             </a:fld>
             <a:endParaRPr lang="en-US"/>
           </a:p>
@@ -2711,8 +2711,8 @@
         </p:nvSpPr>
         <p:spPr>
           <a:xfrm>
-            <a:off x="5554134" y="6356351"/>
-            <a:ext cx="5147733" cy="365125"/>
+            <a:off x="5554135" y="7512052"/>
+            <a:ext cx="5147733" cy="431511"/>
           </a:xfrm>
           <a:prstGeom prst="rect">
             <a:avLst/>
@@ -2748,8 +2748,8 @@
         </p:nvSpPr>
         <p:spPr>
           <a:xfrm>
-            <a:off x="11650133" y="6356351"/>
-            <a:ext cx="3793067" cy="365125"/>
+            <a:off x="11650134" y="7512052"/>
+            <a:ext cx="3793067" cy="431511"/>
           </a:xfrm>
           <a:prstGeom prst="rect">
             <a:avLst/>
@@ -3072,7 +3072,7 @@
         </p:nvGrpSpPr>
         <p:grpSpPr>
           <a:xfrm>
-            <a:off x="0" y="-1879600"/>
+            <a:off x="0" y="-224708"/>
             <a:ext cx="17881600" cy="2053508"/>
             <a:chOff x="0" y="0"/>
             <a:chExt cx="3506196" cy="402648"/>
@@ -3162,7 +3162,7 @@
         </p:nvSpPr>
         <p:spPr>
           <a:xfrm>
-            <a:off x="15163926" y="-1269923"/>
+            <a:off x="15163926" y="437267"/>
             <a:ext cx="2311740" cy="834153"/>
           </a:xfrm>
           <a:custGeom>
@@ -3215,7 +3215,7 @@
         </p:nvSpPr>
         <p:spPr>
           <a:xfrm>
-            <a:off x="4697123" y="609600"/>
+            <a:off x="4697124" y="2281788"/>
             <a:ext cx="5213573" cy="0"/>
           </a:xfrm>
           <a:prstGeom prst="line">
@@ -3246,7 +3246,7 @@
         </p:nvSpPr>
         <p:spPr>
           <a:xfrm>
-            <a:off x="518835" y="11379815"/>
+            <a:off x="518836" y="13208615"/>
             <a:ext cx="11078587" cy="0"/>
           </a:xfrm>
           <a:prstGeom prst="line">
@@ -3278,13 +3278,13 @@
           <p:nvPr>
             <p:extLst>
               <p:ext uri="{D42A27DB-BD31-4B8C-83A1-F6EECF244321}">
-                <p14:modId xmlns:p14="http://schemas.microsoft.com/office/powerpoint/2010/main" val="1085037999"/>
+                <p14:modId xmlns:p14="http://schemas.microsoft.com/office/powerpoint/2010/main" val="1065300946"/>
               </p:ext>
             </p:extLst>
           </p:nvPr>
         </p:nvGraphicFramePr>
         <p:xfrm>
-          <a:off x="416413" y="1447800"/>
+          <a:off x="416414" y="3119989"/>
           <a:ext cx="3329909" cy="4195211"/>
         </p:xfrm>
         <a:graphic>
@@ -4875,13 +4875,13 @@
           <p:nvPr>
             <p:extLst>
               <p:ext uri="{D42A27DB-BD31-4B8C-83A1-F6EECF244321}">
-                <p14:modId xmlns:p14="http://schemas.microsoft.com/office/powerpoint/2010/main" val="1537978272"/>
+                <p14:modId xmlns:p14="http://schemas.microsoft.com/office/powerpoint/2010/main" val="3216561150"/>
               </p:ext>
             </p:extLst>
           </p:nvPr>
         </p:nvGraphicFramePr>
         <p:xfrm>
-          <a:off x="12529409" y="1676400"/>
+          <a:off x="12529409" y="3348588"/>
           <a:ext cx="4946256" cy="2353832"/>
         </p:xfrm>
         <a:graphic>
@@ -5606,7 +5606,7 @@
         </p:nvGrpSpPr>
         <p:grpSpPr>
           <a:xfrm>
-            <a:off x="12529408" y="4419600"/>
+            <a:off x="12529408" y="6091788"/>
             <a:ext cx="4946258" cy="5105400"/>
             <a:chOff x="0" y="0"/>
             <a:chExt cx="3709693" cy="4163148"/>
@@ -5716,13 +5716,13 @@
           <p:nvPr>
             <p:extLst>
               <p:ext uri="{D42A27DB-BD31-4B8C-83A1-F6EECF244321}">
-                <p14:modId xmlns:p14="http://schemas.microsoft.com/office/powerpoint/2010/main" val="1721745918"/>
+                <p14:modId xmlns:p14="http://schemas.microsoft.com/office/powerpoint/2010/main" val="2033880184"/>
               </p:ext>
             </p:extLst>
           </p:nvPr>
         </p:nvGraphicFramePr>
         <p:xfrm>
-          <a:off x="12600345" y="4495800"/>
+          <a:off x="12600345" y="6167988"/>
           <a:ext cx="4805490" cy="420738"/>
         </p:xfrm>
         <a:graphic>
@@ -6051,13 +6051,13 @@
           <p:nvPr>
             <p:extLst>
               <p:ext uri="{D42A27DB-BD31-4B8C-83A1-F6EECF244321}">
-                <p14:modId xmlns:p14="http://schemas.microsoft.com/office/powerpoint/2010/main" val="1550037274"/>
+                <p14:modId xmlns:p14="http://schemas.microsoft.com/office/powerpoint/2010/main" val="1611406467"/>
               </p:ext>
             </p:extLst>
           </p:nvPr>
         </p:nvGraphicFramePr>
         <p:xfrm>
-          <a:off x="421517" y="5791200"/>
+          <a:off x="421517" y="7463389"/>
           <a:ext cx="3368770" cy="4195211"/>
         </p:xfrm>
         <a:graphic>
@@ -7648,13 +7648,13 @@
           <p:nvPr>
             <p:extLst>
               <p:ext uri="{D42A27DB-BD31-4B8C-83A1-F6EECF244321}">
-                <p14:modId xmlns:p14="http://schemas.microsoft.com/office/powerpoint/2010/main" val="1168392661"/>
+                <p14:modId xmlns:p14="http://schemas.microsoft.com/office/powerpoint/2010/main" val="1871741900"/>
               </p:ext>
             </p:extLst>
           </p:nvPr>
         </p:nvGraphicFramePr>
         <p:xfrm>
-          <a:off x="4448065" y="1447800"/>
+          <a:off x="4448065" y="3119989"/>
           <a:ext cx="3398292" cy="4195211"/>
         </p:xfrm>
         <a:graphic>
@@ -9257,13 +9257,13 @@
           <p:nvPr>
             <p:extLst>
               <p:ext uri="{D42A27DB-BD31-4B8C-83A1-F6EECF244321}">
-                <p14:modId xmlns:p14="http://schemas.microsoft.com/office/powerpoint/2010/main" val="1760523378"/>
+                <p14:modId xmlns:p14="http://schemas.microsoft.com/office/powerpoint/2010/main" val="3060474413"/>
               </p:ext>
             </p:extLst>
           </p:nvPr>
         </p:nvGraphicFramePr>
         <p:xfrm>
-          <a:off x="4448064" y="5791200"/>
+          <a:off x="4448064" y="7463389"/>
           <a:ext cx="3388608" cy="4195211"/>
         </p:xfrm>
         <a:graphic>
@@ -10854,13 +10854,13 @@
           <p:nvPr>
             <p:extLst>
               <p:ext uri="{D42A27DB-BD31-4B8C-83A1-F6EECF244321}">
-                <p14:modId xmlns:p14="http://schemas.microsoft.com/office/powerpoint/2010/main" val="566071789"/>
+                <p14:modId xmlns:p14="http://schemas.microsoft.com/office/powerpoint/2010/main" val="4275142115"/>
               </p:ext>
             </p:extLst>
           </p:nvPr>
         </p:nvGraphicFramePr>
         <p:xfrm>
-          <a:off x="8481510" y="1447800"/>
+          <a:off x="8481511" y="3119989"/>
           <a:ext cx="3428287" cy="4195211"/>
         </p:xfrm>
         <a:graphic>
@@ -12451,13 +12451,13 @@
           <p:nvPr>
             <p:extLst>
               <p:ext uri="{D42A27DB-BD31-4B8C-83A1-F6EECF244321}">
-                <p14:modId xmlns:p14="http://schemas.microsoft.com/office/powerpoint/2010/main" val="3781840950"/>
+                <p14:modId xmlns:p14="http://schemas.microsoft.com/office/powerpoint/2010/main" val="2326203325"/>
               </p:ext>
             </p:extLst>
           </p:nvPr>
         </p:nvGraphicFramePr>
         <p:xfrm>
-          <a:off x="8481510" y="5786989"/>
+          <a:off x="8481510" y="7459178"/>
           <a:ext cx="3368770" cy="4195211"/>
         </p:xfrm>
         <a:graphic>
@@ -14059,7 +14059,7 @@
         </p:nvGrpSpPr>
         <p:grpSpPr>
           <a:xfrm>
-            <a:off x="416346" y="-1387964"/>
+            <a:off x="416346" y="319226"/>
             <a:ext cx="5225182" cy="1128574"/>
             <a:chOff x="0" y="85725"/>
             <a:chExt cx="3918887" cy="846430"/>
@@ -14123,7 +14123,7 @@
                 </a:lnSpc>
               </a:pPr>
               <a:r>
-                <a:rPr lang="en-US" sz="3378" b="1">
+                <a:rPr lang="en-US" sz="3378" b="1" dirty="0">
                   <a:solidFill>
                     <a:srgbClr val="FFFFFF"/>
                   </a:solidFill>
@@ -14187,7 +14187,7 @@
         </p:nvSpPr>
         <p:spPr>
           <a:xfrm>
-            <a:off x="416413" y="609600"/>
+            <a:off x="416414" y="2281788"/>
             <a:ext cx="1062647" cy="8466"/>
           </a:xfrm>
           <a:prstGeom prst="line">
@@ -14218,7 +14218,7 @@
         </p:nvSpPr>
         <p:spPr>
           <a:xfrm>
-            <a:off x="1779732" y="228600"/>
+            <a:off x="1779732" y="1900788"/>
             <a:ext cx="2612592" cy="592150"/>
           </a:xfrm>
           <a:prstGeom prst="rect">
@@ -14259,7 +14259,7 @@
         </p:nvSpPr>
         <p:spPr>
           <a:xfrm>
-            <a:off x="10124762" y="228600"/>
+            <a:off x="10124762" y="1900788"/>
             <a:ext cx="7345666" cy="592150"/>
           </a:xfrm>
           <a:prstGeom prst="rect">
@@ -14312,7 +14312,7 @@
         </p:nvSpPr>
         <p:spPr>
           <a:xfrm>
-            <a:off x="416346" y="762000"/>
+            <a:off x="416347" y="2434188"/>
             <a:ext cx="6852549" cy="592150"/>
           </a:xfrm>
           <a:prstGeom prst="rect">
@@ -14353,7 +14353,7 @@
         </p:nvSpPr>
         <p:spPr>
           <a:xfrm>
-            <a:off x="10268819" y="990600"/>
+            <a:off x="10268820" y="2662789"/>
             <a:ext cx="7201609" cy="414537"/>
           </a:xfrm>
           <a:prstGeom prst="rect">
@@ -14394,7 +14394,7 @@
         </p:nvSpPr>
         <p:spPr>
           <a:xfrm>
-            <a:off x="12184958" y="11049615"/>
+            <a:off x="12184958" y="12878415"/>
             <a:ext cx="5285468" cy="439287"/>
           </a:xfrm>
           <a:prstGeom prst="rect">

--- a/storeinsight/public/COMPSETTEMPLATE.pptx
+++ b/storeinsight/public/COMPSETTEMPLATE.pptx
@@ -313,7 +313,7 @@
             <a:fld id="{1D8BD707-D9CF-40AE-B4C6-C98DA3205C09}" type="datetimeFigureOut">
               <a:rPr lang="en-US" smtClean="0"/>
               <a:pPr/>
-              <a:t>2/24/2026</a:t>
+              <a:t>2/25/2026</a:t>
             </a:fld>
             <a:endParaRPr lang="en-US"/>
           </a:p>
@@ -478,7 +478,7 @@
             <a:fld id="{1D8BD707-D9CF-40AE-B4C6-C98DA3205C09}" type="datetimeFigureOut">
               <a:rPr lang="en-US" smtClean="0"/>
               <a:pPr/>
-              <a:t>2/24/2026</a:t>
+              <a:t>2/25/2026</a:t>
             </a:fld>
             <a:endParaRPr lang="en-US"/>
           </a:p>
@@ -653,7 +653,7 @@
             <a:fld id="{1D8BD707-D9CF-40AE-B4C6-C98DA3205C09}" type="datetimeFigureOut">
               <a:rPr lang="en-US" smtClean="0"/>
               <a:pPr/>
-              <a:t>2/24/2026</a:t>
+              <a:t>2/25/2026</a:t>
             </a:fld>
             <a:endParaRPr lang="en-US"/>
           </a:p>
@@ -818,7 +818,7 @@
             <a:fld id="{1D8BD707-D9CF-40AE-B4C6-C98DA3205C09}" type="datetimeFigureOut">
               <a:rPr lang="en-US" smtClean="0"/>
               <a:pPr/>
-              <a:t>2/24/2026</a:t>
+              <a:t>2/25/2026</a:t>
             </a:fld>
             <a:endParaRPr lang="en-US"/>
           </a:p>
@@ -1060,7 +1060,7 @@
             <a:fld id="{1D8BD707-D9CF-40AE-B4C6-C98DA3205C09}" type="datetimeFigureOut">
               <a:rPr lang="en-US" smtClean="0"/>
               <a:pPr/>
-              <a:t>2/24/2026</a:t>
+              <a:t>2/25/2026</a:t>
             </a:fld>
             <a:endParaRPr lang="en-US"/>
           </a:p>
@@ -1342,7 +1342,7 @@
             <a:fld id="{1D8BD707-D9CF-40AE-B4C6-C98DA3205C09}" type="datetimeFigureOut">
               <a:rPr lang="en-US" smtClean="0"/>
               <a:pPr/>
-              <a:t>2/24/2026</a:t>
+              <a:t>2/25/2026</a:t>
             </a:fld>
             <a:endParaRPr lang="en-US"/>
           </a:p>
@@ -1758,7 +1758,7 @@
             <a:fld id="{1D8BD707-D9CF-40AE-B4C6-C98DA3205C09}" type="datetimeFigureOut">
               <a:rPr lang="en-US" smtClean="0"/>
               <a:pPr/>
-              <a:t>2/24/2026</a:t>
+              <a:t>2/25/2026</a:t>
             </a:fld>
             <a:endParaRPr lang="en-US"/>
           </a:p>
@@ -1872,7 +1872,7 @@
             <a:fld id="{1D8BD707-D9CF-40AE-B4C6-C98DA3205C09}" type="datetimeFigureOut">
               <a:rPr lang="en-US" smtClean="0"/>
               <a:pPr/>
-              <a:t>2/24/2026</a:t>
+              <a:t>2/25/2026</a:t>
             </a:fld>
             <a:endParaRPr lang="en-US"/>
           </a:p>
@@ -1964,7 +1964,7 @@
             <a:fld id="{1D8BD707-D9CF-40AE-B4C6-C98DA3205C09}" type="datetimeFigureOut">
               <a:rPr lang="en-US" smtClean="0"/>
               <a:pPr/>
-              <a:t>2/24/2026</a:t>
+              <a:t>2/25/2026</a:t>
             </a:fld>
             <a:endParaRPr lang="en-US"/>
           </a:p>
@@ -2236,7 +2236,7 @@
             <a:fld id="{1D8BD707-D9CF-40AE-B4C6-C98DA3205C09}" type="datetimeFigureOut">
               <a:rPr lang="en-US" smtClean="0"/>
               <a:pPr/>
-              <a:t>2/24/2026</a:t>
+              <a:t>2/25/2026</a:t>
             </a:fld>
             <a:endParaRPr lang="en-US"/>
           </a:p>
@@ -2485,7 +2485,7 @@
             <a:fld id="{1D8BD707-D9CF-40AE-B4C6-C98DA3205C09}" type="datetimeFigureOut">
               <a:rPr lang="en-US" smtClean="0"/>
               <a:pPr/>
-              <a:t>2/24/2026</a:t>
+              <a:t>2/25/2026</a:t>
             </a:fld>
             <a:endParaRPr lang="en-US"/>
           </a:p>
@@ -2693,7 +2693,7 @@
             <a:fld id="{1D8BD707-D9CF-40AE-B4C6-C98DA3205C09}" type="datetimeFigureOut">
               <a:rPr lang="en-US" smtClean="0"/>
               <a:pPr/>
-              <a:t>2/24/2026</a:t>
+              <a:t>2/25/2026</a:t>
             </a:fld>
             <a:endParaRPr lang="en-US"/>
           </a:p>
@@ -3215,7 +3215,7 @@
         </p:nvSpPr>
         <p:spPr>
           <a:xfrm>
-            <a:off x="4697124" y="2281788"/>
+            <a:off x="4697124" y="2133600"/>
             <a:ext cx="5213573" cy="0"/>
           </a:xfrm>
           <a:prstGeom prst="line">
@@ -3246,7 +3246,7 @@
         </p:nvSpPr>
         <p:spPr>
           <a:xfrm>
-            <a:off x="518836" y="13208615"/>
+            <a:off x="518836" y="11658600"/>
             <a:ext cx="11078587" cy="0"/>
           </a:xfrm>
           <a:prstGeom prst="line">
@@ -3278,13 +3278,13 @@
           <p:nvPr>
             <p:extLst>
               <p:ext uri="{D42A27DB-BD31-4B8C-83A1-F6EECF244321}">
-                <p14:modId xmlns:p14="http://schemas.microsoft.com/office/powerpoint/2010/main" val="1065300946"/>
+                <p14:modId xmlns:p14="http://schemas.microsoft.com/office/powerpoint/2010/main" val="3067458257"/>
               </p:ext>
             </p:extLst>
           </p:nvPr>
         </p:nvGraphicFramePr>
         <p:xfrm>
-          <a:off x="416414" y="3119989"/>
+          <a:off x="416414" y="2971800"/>
           <a:ext cx="3329909" cy="4195211"/>
         </p:xfrm>
         <a:graphic>
@@ -3601,7 +3601,7 @@
                     <a:p>
                       <a:pPr algn="ctr">
                         <a:lnSpc>
-                          <a:spcPts val="350"/>
+                          <a:spcPct val="150000"/>
                         </a:lnSpc>
                         <a:defRPr/>
                       </a:pPr>
@@ -4875,13 +4875,13 @@
           <p:nvPr>
             <p:extLst>
               <p:ext uri="{D42A27DB-BD31-4B8C-83A1-F6EECF244321}">
-                <p14:modId xmlns:p14="http://schemas.microsoft.com/office/powerpoint/2010/main" val="3216561150"/>
+                <p14:modId xmlns:p14="http://schemas.microsoft.com/office/powerpoint/2010/main" val="2662270937"/>
               </p:ext>
             </p:extLst>
           </p:nvPr>
         </p:nvGraphicFramePr>
         <p:xfrm>
-          <a:off x="12529409" y="3348588"/>
+          <a:off x="12529409" y="3200400"/>
           <a:ext cx="4946256" cy="2353832"/>
         </p:xfrm>
         <a:graphic>
@@ -5606,7 +5606,7 @@
         </p:nvGrpSpPr>
         <p:grpSpPr>
           <a:xfrm>
-            <a:off x="12529408" y="6091788"/>
+            <a:off x="12529408" y="5943600"/>
             <a:ext cx="4946258" cy="5105400"/>
             <a:chOff x="0" y="0"/>
             <a:chExt cx="3709693" cy="4163148"/>
@@ -5716,13 +5716,13 @@
           <p:nvPr>
             <p:extLst>
               <p:ext uri="{D42A27DB-BD31-4B8C-83A1-F6EECF244321}">
-                <p14:modId xmlns:p14="http://schemas.microsoft.com/office/powerpoint/2010/main" val="2033880184"/>
+                <p14:modId xmlns:p14="http://schemas.microsoft.com/office/powerpoint/2010/main" val="3959029078"/>
               </p:ext>
             </p:extLst>
           </p:nvPr>
         </p:nvGraphicFramePr>
         <p:xfrm>
-          <a:off x="12600345" y="6167988"/>
+          <a:off x="12600345" y="6019800"/>
           <a:ext cx="4805490" cy="420738"/>
         </p:xfrm>
         <a:graphic>
@@ -6051,13 +6051,13 @@
           <p:nvPr>
             <p:extLst>
               <p:ext uri="{D42A27DB-BD31-4B8C-83A1-F6EECF244321}">
-                <p14:modId xmlns:p14="http://schemas.microsoft.com/office/powerpoint/2010/main" val="1611406467"/>
+                <p14:modId xmlns:p14="http://schemas.microsoft.com/office/powerpoint/2010/main" val="4156744404"/>
               </p:ext>
             </p:extLst>
           </p:nvPr>
         </p:nvGraphicFramePr>
         <p:xfrm>
-          <a:off x="421517" y="7463389"/>
+          <a:off x="421517" y="7315200"/>
           <a:ext cx="3368770" cy="4195211"/>
         </p:xfrm>
         <a:graphic>
@@ -6374,7 +6374,7 @@
                     <a:p>
                       <a:pPr algn="ctr">
                         <a:lnSpc>
-                          <a:spcPts val="350"/>
+                          <a:spcPct val="150000"/>
                         </a:lnSpc>
                         <a:defRPr/>
                       </a:pPr>
@@ -7648,13 +7648,13 @@
           <p:nvPr>
             <p:extLst>
               <p:ext uri="{D42A27DB-BD31-4B8C-83A1-F6EECF244321}">
-                <p14:modId xmlns:p14="http://schemas.microsoft.com/office/powerpoint/2010/main" val="1871741900"/>
+                <p14:modId xmlns:p14="http://schemas.microsoft.com/office/powerpoint/2010/main" val="4241337386"/>
               </p:ext>
             </p:extLst>
           </p:nvPr>
         </p:nvGraphicFramePr>
         <p:xfrm>
-          <a:off x="4448065" y="3119989"/>
+          <a:off x="4448065" y="2971800"/>
           <a:ext cx="3398292" cy="4195211"/>
         </p:xfrm>
         <a:graphic>
@@ -7971,7 +7971,7 @@
                     <a:p>
                       <a:pPr algn="ctr">
                         <a:lnSpc>
-                          <a:spcPts val="350"/>
+                          <a:spcPct val="150000"/>
                         </a:lnSpc>
                         <a:defRPr/>
                       </a:pPr>
@@ -9257,13 +9257,13 @@
           <p:nvPr>
             <p:extLst>
               <p:ext uri="{D42A27DB-BD31-4B8C-83A1-F6EECF244321}">
-                <p14:modId xmlns:p14="http://schemas.microsoft.com/office/powerpoint/2010/main" val="3060474413"/>
+                <p14:modId xmlns:p14="http://schemas.microsoft.com/office/powerpoint/2010/main" val="62417990"/>
               </p:ext>
             </p:extLst>
           </p:nvPr>
         </p:nvGraphicFramePr>
         <p:xfrm>
-          <a:off x="4448064" y="7463389"/>
+          <a:off x="4448064" y="7315200"/>
           <a:ext cx="3388608" cy="4195211"/>
         </p:xfrm>
         <a:graphic>
@@ -9580,7 +9580,7 @@
                     <a:p>
                       <a:pPr algn="ctr">
                         <a:lnSpc>
-                          <a:spcPts val="350"/>
+                          <a:spcPct val="150000"/>
                         </a:lnSpc>
                         <a:defRPr/>
                       </a:pPr>
@@ -10854,13 +10854,13 @@
           <p:nvPr>
             <p:extLst>
               <p:ext uri="{D42A27DB-BD31-4B8C-83A1-F6EECF244321}">
-                <p14:modId xmlns:p14="http://schemas.microsoft.com/office/powerpoint/2010/main" val="4275142115"/>
+                <p14:modId xmlns:p14="http://schemas.microsoft.com/office/powerpoint/2010/main" val="4047922937"/>
               </p:ext>
             </p:extLst>
           </p:nvPr>
         </p:nvGraphicFramePr>
         <p:xfrm>
-          <a:off x="8481511" y="3119989"/>
+          <a:off x="8481511" y="2971800"/>
           <a:ext cx="3428287" cy="4195211"/>
         </p:xfrm>
         <a:graphic>
@@ -11177,7 +11177,7 @@
                     <a:p>
                       <a:pPr algn="ctr">
                         <a:lnSpc>
-                          <a:spcPts val="350"/>
+                          <a:spcPct val="150000"/>
                         </a:lnSpc>
                         <a:defRPr/>
                       </a:pPr>
@@ -12451,28 +12451,28 @@
           <p:nvPr>
             <p:extLst>
               <p:ext uri="{D42A27DB-BD31-4B8C-83A1-F6EECF244321}">
-                <p14:modId xmlns:p14="http://schemas.microsoft.com/office/powerpoint/2010/main" val="2326203325"/>
+                <p14:modId xmlns:p14="http://schemas.microsoft.com/office/powerpoint/2010/main" val="2545676160"/>
               </p:ext>
             </p:extLst>
           </p:nvPr>
         </p:nvGraphicFramePr>
         <p:xfrm>
-          <a:off x="8481510" y="7459178"/>
-          <a:ext cx="3368770" cy="4195211"/>
+          <a:off x="8481509" y="7310989"/>
+          <a:ext cx="3428287" cy="4195211"/>
         </p:xfrm>
         <a:graphic>
           <a:graphicData uri="http://schemas.openxmlformats.org/drawingml/2006/table">
             <a:tbl>
               <a:tblPr/>
               <a:tblGrid>
-                <a:gridCol w="1774103">
+                <a:gridCol w="1805447">
                   <a:extLst>
                     <a:ext uri="{9D8B030D-6E8A-4147-A177-3AD203B41FA5}">
                       <a16:colId xmlns:a16="http://schemas.microsoft.com/office/drawing/2014/main" val="20000"/>
                     </a:ext>
                   </a:extLst>
                 </a:gridCol>
-                <a:gridCol w="1594667">
+                <a:gridCol w="1622840">
                   <a:extLst>
                     <a:ext uri="{9D8B030D-6E8A-4147-A177-3AD203B41FA5}">
                       <a16:colId xmlns:a16="http://schemas.microsoft.com/office/drawing/2014/main" val="20001"/>
@@ -12774,12 +12774,12 @@
                     <a:p>
                       <a:pPr algn="ctr">
                         <a:lnSpc>
-                          <a:spcPts val="350"/>
+                          <a:spcPct val="150000"/>
                         </a:lnSpc>
                         <a:defRPr/>
                       </a:pPr>
                       <a:r>
-                        <a:rPr lang="en-US" sz="1200">
+                        <a:rPr lang="en-US" sz="1200" dirty="0">
                           <a:solidFill>
                             <a:srgbClr val="4A4A4A"/>
                           </a:solidFill>
@@ -12788,19 +12788,7 @@
                           <a:cs typeface="Avenir"/>
                           <a:sym typeface="Avenir"/>
                         </a:rPr>
-                        <a:t>{{PP6DIST}} Miles </a:t>
-                      </a:r>
-                      <a:r>
-                        <a:rPr lang="en-US" sz="1200" dirty="0">
-                          <a:solidFill>
-                            <a:srgbClr val="4A4A4A"/>
-                          </a:solidFill>
-                          <a:latin typeface="Avenir"/>
-                          <a:ea typeface="Avenir"/>
-                          <a:cs typeface="Avenir"/>
-                          <a:sym typeface="Avenir"/>
-                        </a:rPr>
-                        <a:t>Away</a:t>
+                        <a:t>{{PP6DIST}} Miles Away</a:t>
                       </a:r>
                       <a:endParaRPr lang="en-US" sz="2000" dirty="0"/>
                     </a:p>
@@ -14187,7 +14175,7 @@
         </p:nvSpPr>
         <p:spPr>
           <a:xfrm>
-            <a:off x="416414" y="2281788"/>
+            <a:off x="416414" y="2125134"/>
             <a:ext cx="1062647" cy="8466"/>
           </a:xfrm>
           <a:prstGeom prst="line">
@@ -14218,7 +14206,7 @@
         </p:nvSpPr>
         <p:spPr>
           <a:xfrm>
-            <a:off x="1779732" y="1900788"/>
+            <a:off x="1779732" y="1752600"/>
             <a:ext cx="2612592" cy="592150"/>
           </a:xfrm>
           <a:prstGeom prst="rect">
@@ -14312,7 +14300,7 @@
         </p:nvSpPr>
         <p:spPr>
           <a:xfrm>
-            <a:off x="416347" y="2434188"/>
+            <a:off x="416347" y="2286000"/>
             <a:ext cx="6852549" cy="592150"/>
           </a:xfrm>
           <a:prstGeom prst="rect">
@@ -14353,7 +14341,7 @@
         </p:nvSpPr>
         <p:spPr>
           <a:xfrm>
-            <a:off x="10268820" y="2662789"/>
+            <a:off x="10268820" y="2514600"/>
             <a:ext cx="7201609" cy="414537"/>
           </a:xfrm>
           <a:prstGeom prst="rect">
@@ -14394,7 +14382,7 @@
         </p:nvSpPr>
         <p:spPr>
           <a:xfrm>
-            <a:off x="12184958" y="12878415"/>
+            <a:off x="12184958" y="11353800"/>
             <a:ext cx="5285468" cy="439287"/>
           </a:xfrm>
           <a:prstGeom prst="rect">
@@ -14413,7 +14401,7 @@
               </a:lnSpc>
             </a:pPr>
             <a:r>
-              <a:rPr lang="en-US" sz="2667">
+              <a:rPr lang="en-US" sz="2667" dirty="0">
                 <a:solidFill>
                   <a:srgbClr val="000000"/>
                 </a:solidFill>
@@ -14425,7 +14413,7 @@
               <a:t>Prepared by </a:t>
             </a:r>
             <a:r>
-              <a:rPr lang="en-US" sz="2667" b="1">
+              <a:rPr lang="en-US" sz="2667" b="1" dirty="0">
                 <a:solidFill>
                   <a:srgbClr val="000000"/>
                 </a:solidFill>

--- a/storeinsight/public/COMPSETTEMPLATE.pptx
+++ b/storeinsight/public/COMPSETTEMPLATE.pptx
@@ -17,6 +17,7 @@
     <p:embeddedFont>
       <p:font typeface="Avenir Bold" panose="020B0604020202020204" charset="0"/>
       <p:regular r:id="rId4"/>
+      <p:bold r:id="rId5"/>
     </p:embeddedFont>
   </p:embeddedFontLst>
   <p:defaultTextStyle>
@@ -313,7 +314,7 @@
             <a:fld id="{1D8BD707-D9CF-40AE-B4C6-C98DA3205C09}" type="datetimeFigureOut">
               <a:rPr lang="en-US" smtClean="0"/>
               <a:pPr/>
-              <a:t>2/25/2026</a:t>
+              <a:t>3/24/2026</a:t>
             </a:fld>
             <a:endParaRPr lang="en-US"/>
           </a:p>
@@ -478,7 +479,7 @@
             <a:fld id="{1D8BD707-D9CF-40AE-B4C6-C98DA3205C09}" type="datetimeFigureOut">
               <a:rPr lang="en-US" smtClean="0"/>
               <a:pPr/>
-              <a:t>2/25/2026</a:t>
+              <a:t>3/24/2026</a:t>
             </a:fld>
             <a:endParaRPr lang="en-US"/>
           </a:p>
@@ -653,7 +654,7 @@
             <a:fld id="{1D8BD707-D9CF-40AE-B4C6-C98DA3205C09}" type="datetimeFigureOut">
               <a:rPr lang="en-US" smtClean="0"/>
               <a:pPr/>
-              <a:t>2/25/2026</a:t>
+              <a:t>3/24/2026</a:t>
             </a:fld>
             <a:endParaRPr lang="en-US"/>
           </a:p>
@@ -818,7 +819,7 @@
             <a:fld id="{1D8BD707-D9CF-40AE-B4C6-C98DA3205C09}" type="datetimeFigureOut">
               <a:rPr lang="en-US" smtClean="0"/>
               <a:pPr/>
-              <a:t>2/25/2026</a:t>
+              <a:t>3/24/2026</a:t>
             </a:fld>
             <a:endParaRPr lang="en-US"/>
           </a:p>
@@ -1060,7 +1061,7 @@
             <a:fld id="{1D8BD707-D9CF-40AE-B4C6-C98DA3205C09}" type="datetimeFigureOut">
               <a:rPr lang="en-US" smtClean="0"/>
               <a:pPr/>
-              <a:t>2/25/2026</a:t>
+              <a:t>3/24/2026</a:t>
             </a:fld>
             <a:endParaRPr lang="en-US"/>
           </a:p>
@@ -1342,7 +1343,7 @@
             <a:fld id="{1D8BD707-D9CF-40AE-B4C6-C98DA3205C09}" type="datetimeFigureOut">
               <a:rPr lang="en-US" smtClean="0"/>
               <a:pPr/>
-              <a:t>2/25/2026</a:t>
+              <a:t>3/24/2026</a:t>
             </a:fld>
             <a:endParaRPr lang="en-US"/>
           </a:p>
@@ -1758,7 +1759,7 @@
             <a:fld id="{1D8BD707-D9CF-40AE-B4C6-C98DA3205C09}" type="datetimeFigureOut">
               <a:rPr lang="en-US" smtClean="0"/>
               <a:pPr/>
-              <a:t>2/25/2026</a:t>
+              <a:t>3/24/2026</a:t>
             </a:fld>
             <a:endParaRPr lang="en-US"/>
           </a:p>
@@ -1872,7 +1873,7 @@
             <a:fld id="{1D8BD707-D9CF-40AE-B4C6-C98DA3205C09}" type="datetimeFigureOut">
               <a:rPr lang="en-US" smtClean="0"/>
               <a:pPr/>
-              <a:t>2/25/2026</a:t>
+              <a:t>3/24/2026</a:t>
             </a:fld>
             <a:endParaRPr lang="en-US"/>
           </a:p>
@@ -1964,7 +1965,7 @@
             <a:fld id="{1D8BD707-D9CF-40AE-B4C6-C98DA3205C09}" type="datetimeFigureOut">
               <a:rPr lang="en-US" smtClean="0"/>
               <a:pPr/>
-              <a:t>2/25/2026</a:t>
+              <a:t>3/24/2026</a:t>
             </a:fld>
             <a:endParaRPr lang="en-US"/>
           </a:p>
@@ -2236,7 +2237,7 @@
             <a:fld id="{1D8BD707-D9CF-40AE-B4C6-C98DA3205C09}" type="datetimeFigureOut">
               <a:rPr lang="en-US" smtClean="0"/>
               <a:pPr/>
-              <a:t>2/25/2026</a:t>
+              <a:t>3/24/2026</a:t>
             </a:fld>
             <a:endParaRPr lang="en-US"/>
           </a:p>
@@ -2485,7 +2486,7 @@
             <a:fld id="{1D8BD707-D9CF-40AE-B4C6-C98DA3205C09}" type="datetimeFigureOut">
               <a:rPr lang="en-US" smtClean="0"/>
               <a:pPr/>
-              <a:t>2/25/2026</a:t>
+              <a:t>3/24/2026</a:t>
             </a:fld>
             <a:endParaRPr lang="en-US"/>
           </a:p>
@@ -2693,7 +2694,7 @@
             <a:fld id="{1D8BD707-D9CF-40AE-B4C6-C98DA3205C09}" type="datetimeFigureOut">
               <a:rPr lang="en-US" smtClean="0"/>
               <a:pPr/>
-              <a:t>2/25/2026</a:t>
+              <a:t>3/24/2026</a:t>
             </a:fld>
             <a:endParaRPr lang="en-US"/>
           </a:p>
@@ -3278,7 +3279,7 @@
           <p:nvPr>
             <p:extLst>
               <p:ext uri="{D42A27DB-BD31-4B8C-83A1-F6EECF244321}">
-                <p14:modId xmlns:p14="http://schemas.microsoft.com/office/powerpoint/2010/main" val="3067458257"/>
+                <p14:modId xmlns:p14="http://schemas.microsoft.com/office/powerpoint/2010/main" val="443456033"/>
               </p:ext>
             </p:extLst>
           </p:nvPr>
@@ -3606,7 +3607,7 @@
                         <a:defRPr/>
                       </a:pPr>
                       <a:r>
-                        <a:rPr lang="en-US" sz="1200" dirty="0">
+                        <a:rPr lang="en-US" sz="1200">
                           <a:solidFill>
                             <a:srgbClr val="4A4A4A"/>
                           </a:solidFill>
@@ -3615,7 +3616,7 @@
                           <a:cs typeface="Avenir"/>
                           <a:sym typeface="Avenir"/>
                         </a:rPr>
-                        <a:t>{{PP1DIST}} Miles Away</a:t>
+                        <a:t>Subject Property</a:t>
                       </a:r>
                       <a:endParaRPr lang="en-US" sz="2000" dirty="0"/>
                     </a:p>
@@ -3748,18 +3749,6 @@
                         </a:lnSpc>
                         <a:defRPr/>
                       </a:pPr>
-                      <a:r>
-                        <a:rPr lang="en-US" sz="1200" dirty="0">
-                          <a:solidFill>
-                            <a:srgbClr val="4A4A4A"/>
-                          </a:solidFill>
-                          <a:latin typeface="Avenir"/>
-                          <a:ea typeface="Avenir"/>
-                          <a:cs typeface="Avenir"/>
-                          <a:sym typeface="Avenir"/>
-                        </a:rPr>
-                        <a:t>{{PP1FIRSTFLOORORAC}}</a:t>
-                      </a:r>
                       <a:endParaRPr lang="en-US" sz="2000" dirty="0"/>
                     </a:p>
                   </a:txBody>
@@ -6051,7 +6040,7 @@
           <p:nvPr>
             <p:extLst>
               <p:ext uri="{D42A27DB-BD31-4B8C-83A1-F6EECF244321}">
-                <p14:modId xmlns:p14="http://schemas.microsoft.com/office/powerpoint/2010/main" val="4156744404"/>
+                <p14:modId xmlns:p14="http://schemas.microsoft.com/office/powerpoint/2010/main" val="1761271982"/>
               </p:ext>
             </p:extLst>
           </p:nvPr>
@@ -6521,19 +6510,7 @@
                         </a:lnSpc>
                         <a:defRPr/>
                       </a:pPr>
-                      <a:r>
-                        <a:rPr lang="en-US" sz="1200">
-                          <a:solidFill>
-                            <a:srgbClr val="4A4A4A"/>
-                          </a:solidFill>
-                          <a:latin typeface="Avenir"/>
-                          <a:ea typeface="Avenir"/>
-                          <a:cs typeface="Avenir"/>
-                          <a:sym typeface="Avenir"/>
-                        </a:rPr>
-                        <a:t>{{PP4FIRSTFLOORORAC}}</a:t>
-                      </a:r>
-                      <a:endParaRPr lang="en-US" sz="2000"/>
+                      <a:endParaRPr lang="en-US" sz="2000" dirty="0"/>
                     </a:p>
                   </a:txBody>
                   <a:tcPr marL="0" marR="0" marT="0" marB="0" anchor="ctr">
@@ -6733,7 +6710,7 @@
                         <a:defRPr/>
                       </a:pPr>
                       <a:r>
-                        <a:rPr lang="en-US" sz="2100" b="1">
+                        <a:rPr lang="en-US" sz="2100" b="1" dirty="0">
                           <a:solidFill>
                             <a:srgbClr val="FFFFFF"/>
                           </a:solidFill>
@@ -6742,9 +6719,21 @@
                           <a:cs typeface="Avenir Bold"/>
                           <a:sym typeface="Avenir Bold"/>
                         </a:rPr>
-                        <a:t>$/sqft</a:t>
+                        <a:t>$/</a:t>
                       </a:r>
-                      <a:endParaRPr lang="en-US" sz="2000"/>
+                      <a:r>
+                        <a:rPr lang="en-US" sz="2100" b="1" dirty="0" err="1">
+                          <a:solidFill>
+                            <a:srgbClr val="FFFFFF"/>
+                          </a:solidFill>
+                          <a:latin typeface="Avenir Bold"/>
+                          <a:ea typeface="Avenir Bold"/>
+                          <a:cs typeface="Avenir Bold"/>
+                          <a:sym typeface="Avenir Bold"/>
+                        </a:rPr>
+                        <a:t>sqft</a:t>
+                      </a:r>
+                      <a:endParaRPr lang="en-US" sz="2000" dirty="0"/>
                     </a:p>
                   </a:txBody>
                   <a:tcPr marL="0" marR="0" marT="0" marB="0" anchor="b">
@@ -7648,7 +7637,7 @@
           <p:nvPr>
             <p:extLst>
               <p:ext uri="{D42A27DB-BD31-4B8C-83A1-F6EECF244321}">
-                <p14:modId xmlns:p14="http://schemas.microsoft.com/office/powerpoint/2010/main" val="4241337386"/>
+                <p14:modId xmlns:p14="http://schemas.microsoft.com/office/powerpoint/2010/main" val="2868760574"/>
               </p:ext>
             </p:extLst>
           </p:nvPr>
@@ -8118,19 +8107,7 @@
                         </a:lnSpc>
                         <a:defRPr/>
                       </a:pPr>
-                      <a:r>
-                        <a:rPr lang="en-US" sz="1200">
-                          <a:solidFill>
-                            <a:srgbClr val="4A4A4A"/>
-                          </a:solidFill>
-                          <a:latin typeface="Avenir"/>
-                          <a:ea typeface="Avenir"/>
-                          <a:cs typeface="Avenir"/>
-                          <a:sym typeface="Avenir"/>
-                        </a:rPr>
-                        <a:t>{{PP2FIRSTFLOORORAC}}</a:t>
-                      </a:r>
-                      <a:endParaRPr lang="en-US" sz="2000"/>
+                      <a:endParaRPr lang="en-US" sz="2000" dirty="0"/>
                     </a:p>
                   </a:txBody>
                   <a:tcPr marL="0" marR="0" marT="0" marB="0" anchor="ctr">
@@ -9257,7 +9234,7 @@
           <p:nvPr>
             <p:extLst>
               <p:ext uri="{D42A27DB-BD31-4B8C-83A1-F6EECF244321}">
-                <p14:modId xmlns:p14="http://schemas.microsoft.com/office/powerpoint/2010/main" val="62417990"/>
+                <p14:modId xmlns:p14="http://schemas.microsoft.com/office/powerpoint/2010/main" val="454384992"/>
               </p:ext>
             </p:extLst>
           </p:nvPr>
@@ -9727,18 +9704,6 @@
                         </a:lnSpc>
                         <a:defRPr/>
                       </a:pPr>
-                      <a:r>
-                        <a:rPr lang="en-US" sz="1200" dirty="0">
-                          <a:solidFill>
-                            <a:srgbClr val="4A4A4A"/>
-                          </a:solidFill>
-                          <a:latin typeface="Avenir"/>
-                          <a:ea typeface="Avenir"/>
-                          <a:cs typeface="Avenir"/>
-                          <a:sym typeface="Avenir"/>
-                        </a:rPr>
-                        <a:t>{{PP5FIRSTFLOORORAC}}</a:t>
-                      </a:r>
                       <a:endParaRPr lang="en-US" sz="2000" dirty="0"/>
                     </a:p>
                   </a:txBody>
@@ -10854,7 +10819,7 @@
           <p:nvPr>
             <p:extLst>
               <p:ext uri="{D42A27DB-BD31-4B8C-83A1-F6EECF244321}">
-                <p14:modId xmlns:p14="http://schemas.microsoft.com/office/powerpoint/2010/main" val="4047922937"/>
+                <p14:modId xmlns:p14="http://schemas.microsoft.com/office/powerpoint/2010/main" val="3486532133"/>
               </p:ext>
             </p:extLst>
           </p:nvPr>
@@ -11324,19 +11289,7 @@
                         </a:lnSpc>
                         <a:defRPr/>
                       </a:pPr>
-                      <a:r>
-                        <a:rPr lang="en-US" sz="1200">
-                          <a:solidFill>
-                            <a:srgbClr val="4A4A4A"/>
-                          </a:solidFill>
-                          <a:latin typeface="Avenir"/>
-                          <a:ea typeface="Avenir"/>
-                          <a:cs typeface="Avenir"/>
-                          <a:sym typeface="Avenir"/>
-                        </a:rPr>
-                        <a:t>{{PP3FIRSTFLOORORAC}}</a:t>
-                      </a:r>
-                      <a:endParaRPr lang="en-US" sz="2000"/>
+                      <a:endParaRPr lang="en-US" sz="2000" dirty="0"/>
                     </a:p>
                   </a:txBody>
                   <a:tcPr marL="0" marR="0" marT="0" marB="0" anchor="ctr">
@@ -12451,7 +12404,7 @@
           <p:nvPr>
             <p:extLst>
               <p:ext uri="{D42A27DB-BD31-4B8C-83A1-F6EECF244321}">
-                <p14:modId xmlns:p14="http://schemas.microsoft.com/office/powerpoint/2010/main" val="2545676160"/>
+                <p14:modId xmlns:p14="http://schemas.microsoft.com/office/powerpoint/2010/main" val="1716052662"/>
               </p:ext>
             </p:extLst>
           </p:nvPr>
@@ -12921,19 +12874,7 @@
                         </a:lnSpc>
                         <a:defRPr/>
                       </a:pPr>
-                      <a:r>
-                        <a:rPr lang="en-US" sz="1200">
-                          <a:solidFill>
-                            <a:srgbClr val="4A4A4A"/>
-                          </a:solidFill>
-                          <a:latin typeface="Avenir"/>
-                          <a:ea typeface="Avenir"/>
-                          <a:cs typeface="Avenir"/>
-                          <a:sym typeface="Avenir"/>
-                        </a:rPr>
-                        <a:t>{{PP6FIRSTFLOORORAC}}</a:t>
-                      </a:r>
-                      <a:endParaRPr lang="en-US" sz="2000"/>
+                      <a:endParaRPr lang="en-US" sz="2000" dirty="0"/>
                     </a:p>
                   </a:txBody>
                   <a:tcPr marL="0" marR="0" marT="0" marB="0" anchor="ctr">
